--- a/Bibe_Def.pptx
+++ b/Bibe_Def.pptx
@@ -2029,7 +2029,7 @@
                 <a:ea typeface="Garamond" pitchFamily="34" charset="-122"/>
                 <a:cs typeface="Garamond" pitchFamily="34" charset="-120"/>
               </a:rPr>
-              <a:t>Lombard Odier — Gestionnaire de référence depuis 1796</a:t>
+              <a:t>Lombard Odier</a:t>
             </a:r>
             <a:endParaRPr lang="en-US" sz="1100" dirty="0"/>
           </a:p>
@@ -3046,7 +3046,40 @@
                 <a:ea typeface="Garamond" pitchFamily="34" charset="-122"/>
                 <a:cs typeface="Garamond" pitchFamily="34" charset="-120"/>
               </a:rPr>
-              <a:t>UBS — 1ère banque suisse</a:t>
+              <a:t>UBS – 1iere </a:t>
+            </a:r>
+            <a:r>
+              <a:rPr lang="en-US" sz="2600" dirty="0" err="1">
+                <a:solidFill>
+                  <a:srgbClr val="1C2B3A"/>
+                </a:solidFill>
+                <a:latin typeface="Garamond" pitchFamily="34" charset="0"/>
+                <a:ea typeface="Garamond" pitchFamily="34" charset="-122"/>
+                <a:cs typeface="Garamond" pitchFamily="34" charset="-120"/>
+              </a:rPr>
+              <a:t>banque</a:t>
+            </a:r>
+            <a:r>
+              <a:rPr lang="en-US" sz="2600" dirty="0">
+                <a:solidFill>
+                  <a:srgbClr val="1C2B3A"/>
+                </a:solidFill>
+                <a:latin typeface="Garamond" pitchFamily="34" charset="0"/>
+                <a:ea typeface="Garamond" pitchFamily="34" charset="-122"/>
+                <a:cs typeface="Garamond" pitchFamily="34" charset="-120"/>
+              </a:rPr>
+              <a:t> </a:t>
+            </a:r>
+            <a:r>
+              <a:rPr lang="en-US" sz="2600" dirty="0" err="1">
+                <a:solidFill>
+                  <a:srgbClr val="1C2B3A"/>
+                </a:solidFill>
+                <a:latin typeface="Garamond" pitchFamily="34" charset="0"/>
+                <a:ea typeface="Garamond" pitchFamily="34" charset="-122"/>
+                <a:cs typeface="Garamond" pitchFamily="34" charset="-120"/>
+              </a:rPr>
+              <a:t>suisse</a:t>
             </a:r>
             <a:endParaRPr lang="en-US" sz="1100" dirty="0"/>
           </a:p>
@@ -4063,7 +4096,7 @@
                 <a:ea typeface="Garamond" pitchFamily="34" charset="-122"/>
                 <a:cs typeface="Garamond" pitchFamily="34" charset="-120"/>
               </a:rPr>
-              <a:t>CIC Market Solutions — Meilleur dépositaire FR</a:t>
+              <a:t>CIC Market Solutions</a:t>
             </a:r>
             <a:endParaRPr lang="en-US" sz="1100" dirty="0"/>
           </a:p>
@@ -5080,7 +5113,29 @@
                 <a:ea typeface="Garamond" pitchFamily="34" charset="-122"/>
                 <a:cs typeface="Garamond" pitchFamily="34" charset="-120"/>
               </a:rPr>
-              <a:t>Eres × Swisslife — Spécialiste PER</a:t>
+              <a:t>Eres × </a:t>
+            </a:r>
+            <a:r>
+              <a:rPr lang="en-US" sz="2600" dirty="0" err="1">
+                <a:solidFill>
+                  <a:srgbClr val="1C2B3A"/>
+                </a:solidFill>
+                <a:latin typeface="Garamond" pitchFamily="34" charset="0"/>
+                <a:ea typeface="Garamond" pitchFamily="34" charset="-122"/>
+                <a:cs typeface="Garamond" pitchFamily="34" charset="-120"/>
+              </a:rPr>
+              <a:t>Swisslife</a:t>
+            </a:r>
+            <a:r>
+              <a:rPr lang="en-US" sz="2600" dirty="0">
+                <a:solidFill>
+                  <a:srgbClr val="1C2B3A"/>
+                </a:solidFill>
+                <a:latin typeface="Garamond" pitchFamily="34" charset="0"/>
+                <a:ea typeface="Garamond" pitchFamily="34" charset="-122"/>
+                <a:cs typeface="Garamond" pitchFamily="34" charset="-120"/>
+              </a:rPr>
+              <a:t>  </a:t>
             </a:r>
             <a:endParaRPr lang="en-US" sz="1100" dirty="0"/>
           </a:p>
@@ -5134,7 +5189,7 @@
         </p:blipFill>
         <p:spPr>
           <a:xfrm>
-            <a:off x="2991757" y="1450000"/>
+            <a:off x="2934964" y="1450000"/>
             <a:ext cx="1637036" cy="884000"/>
           </a:xfrm>
           <a:prstGeom prst="rect">
@@ -5158,7 +5213,7 @@
         </p:blipFill>
         <p:spPr>
           <a:xfrm>
-            <a:off x="4811673" y="1450000"/>
+            <a:off x="4835247" y="1180284"/>
             <a:ext cx="1340570" cy="884000"/>
           </a:xfrm>
           <a:prstGeom prst="rect">
@@ -6121,7 +6176,7 @@
                 <a:ea typeface="Garamond" pitchFamily="34" charset="-122"/>
                 <a:cs typeface="Garamond" pitchFamily="34" charset="-120"/>
               </a:rPr>
-              <a:t>AG2R La Mondiale — Groupe paritaire de référence</a:t>
+              <a:t>AG2R La Mondiale</a:t>
             </a:r>
             <a:endParaRPr lang="en-US" sz="1100" dirty="0"/>
           </a:p>
@@ -7138,7 +7193,18 @@
                 <a:ea typeface="Garamond" pitchFamily="34" charset="-122"/>
                 <a:cs typeface="Garamond" pitchFamily="34" charset="-120"/>
               </a:rPr>
-              <a:t>BNP Paribas Cardif — Leader de l'assurance vie</a:t>
+              <a:t>BNP Paribas </a:t>
+            </a:r>
+            <a:r>
+              <a:rPr lang="en-US" sz="2200" dirty="0" err="1">
+                <a:solidFill>
+                  <a:srgbClr val="1C2B3A"/>
+                </a:solidFill>
+                <a:latin typeface="Garamond" pitchFamily="34" charset="0"/>
+                <a:ea typeface="Garamond" pitchFamily="34" charset="-122"/>
+                <a:cs typeface="Garamond" pitchFamily="34" charset="-120"/>
+              </a:rPr>
+              <a:t>Cardif</a:t>
             </a:r>
             <a:endParaRPr lang="en-US" sz="1100" dirty="0"/>
           </a:p>
@@ -8155,7 +8221,7 @@
                 <a:ea typeface="Garamond" pitchFamily="34" charset="-122"/>
                 <a:cs typeface="Garamond" pitchFamily="34" charset="-120"/>
               </a:rPr>
-              <a:t>BGL BNP Paribas — Excellence luxembourgeoise</a:t>
+              <a:t>BGL BNP Paribas</a:t>
             </a:r>
             <a:endParaRPr lang="en-US" sz="1100" dirty="0"/>
           </a:p>
@@ -9164,7 +9230,7 @@
               <a:buNone/>
             </a:pPr>
             <a:r>
-              <a:rPr lang="en-US" sz="2600" dirty="0">
+              <a:rPr lang="en-US" sz="2600" dirty="0" err="1">
                 <a:solidFill>
                   <a:srgbClr val="1C2B3A"/>
                 </a:solidFill>
@@ -9172,7 +9238,7 @@
                 <a:ea typeface="Garamond" pitchFamily="34" charset="-122"/>
                 <a:cs typeface="Garamond" pitchFamily="34" charset="-120"/>
               </a:rPr>
-              <a:t>Arkéa — Groupe mutualiste solide</a:t>
+              <a:t>Arkéa</a:t>
             </a:r>
             <a:endParaRPr lang="en-US" sz="1100" dirty="0"/>
           </a:p>
@@ -14258,7 +14324,51 @@
                 <a:ea typeface="Garamond" pitchFamily="34" charset="-122"/>
                 <a:cs typeface="Garamond" pitchFamily="34" charset="-120"/>
               </a:rPr>
-              <a:t>Swiss Life — Fondé en 1857</a:t>
+              <a:t>Swiss Life — </a:t>
+            </a:r>
+            <a:r>
+              <a:rPr lang="en-US" sz="2600" dirty="0" err="1">
+                <a:solidFill>
+                  <a:srgbClr val="1C2B3A"/>
+                </a:solidFill>
+                <a:latin typeface="Garamond" pitchFamily="34" charset="0"/>
+                <a:ea typeface="Garamond" pitchFamily="34" charset="-122"/>
+                <a:cs typeface="Garamond" pitchFamily="34" charset="-120"/>
+              </a:rPr>
+              <a:t>Acteur</a:t>
+            </a:r>
+            <a:r>
+              <a:rPr lang="en-US" sz="2600" dirty="0">
+                <a:solidFill>
+                  <a:srgbClr val="1C2B3A"/>
+                </a:solidFill>
+                <a:latin typeface="Garamond" pitchFamily="34" charset="0"/>
+                <a:ea typeface="Garamond" pitchFamily="34" charset="-122"/>
+                <a:cs typeface="Garamond" pitchFamily="34" charset="-120"/>
+              </a:rPr>
+              <a:t> </a:t>
+            </a:r>
+            <a:r>
+              <a:rPr lang="en-US" sz="2600" dirty="0" err="1">
+                <a:solidFill>
+                  <a:srgbClr val="1C2B3A"/>
+                </a:solidFill>
+                <a:latin typeface="Garamond" pitchFamily="34" charset="0"/>
+                <a:ea typeface="Garamond" pitchFamily="34" charset="-122"/>
+                <a:cs typeface="Garamond" pitchFamily="34" charset="-120"/>
+              </a:rPr>
+              <a:t>historique</a:t>
+            </a:r>
+            <a:r>
+              <a:rPr lang="en-US" sz="2600" dirty="0">
+                <a:solidFill>
+                  <a:srgbClr val="1C2B3A"/>
+                </a:solidFill>
+                <a:latin typeface="Garamond" pitchFamily="34" charset="0"/>
+                <a:ea typeface="Garamond" pitchFamily="34" charset="-122"/>
+                <a:cs typeface="Garamond" pitchFamily="34" charset="-120"/>
+              </a:rPr>
+              <a:t> </a:t>
             </a:r>
             <a:endParaRPr lang="en-US" sz="1100" dirty="0"/>
           </a:p>
@@ -60749,7 +60859,7 @@
               <a:buNone/>
             </a:pPr>
             <a:r>
-              <a:rPr lang="en-US" sz="2600" dirty="0">
+              <a:rPr lang="en-US" sz="2600" dirty="0" err="1">
                 <a:solidFill>
                   <a:srgbClr val="1C2B3A"/>
                 </a:solidFill>
@@ -60757,7 +60867,29 @@
                 <a:ea typeface="Garamond" pitchFamily="34" charset="-122"/>
                 <a:cs typeface="Garamond" pitchFamily="34" charset="-120"/>
               </a:rPr>
-              <a:t>Wealins — Wealth Insurance 100 % luxembourgeois</a:t>
+              <a:t>Wealins</a:t>
+            </a:r>
+            <a:r>
+              <a:rPr lang="en-US" sz="2600" dirty="0">
+                <a:solidFill>
+                  <a:srgbClr val="1C2B3A"/>
+                </a:solidFill>
+                <a:latin typeface="Garamond" pitchFamily="34" charset="0"/>
+                <a:ea typeface="Garamond" pitchFamily="34" charset="-122"/>
+                <a:cs typeface="Garamond" pitchFamily="34" charset="-120"/>
+              </a:rPr>
+              <a:t> —100 % </a:t>
+            </a:r>
+            <a:r>
+              <a:rPr lang="en-US" sz="2600" dirty="0" err="1">
+                <a:solidFill>
+                  <a:srgbClr val="1C2B3A"/>
+                </a:solidFill>
+                <a:latin typeface="Garamond" pitchFamily="34" charset="0"/>
+                <a:ea typeface="Garamond" pitchFamily="34" charset="-122"/>
+                <a:cs typeface="Garamond" pitchFamily="34" charset="-120"/>
+              </a:rPr>
+              <a:t>luxembourgeois</a:t>
             </a:r>
             <a:endParaRPr lang="en-US" sz="1100" dirty="0"/>
           </a:p>
@@ -60801,12 +60933,861 @@
           </a:p>
         </p:txBody>
       </p:sp>
+      <p:sp>
+        <p:nvSpPr>
+          <p:cNvPr id="51" name="SV0">
+            <a:extLst>
+              <a:ext uri="{FF2B5EF4-FFF2-40B4-BE49-F238E27FC236}">
+                <a16:creationId xmlns:a16="http://schemas.microsoft.com/office/drawing/2014/main" id="{1183C48B-C28D-7AED-DBF6-B425E63B12A4}"/>
+              </a:ext>
+            </a:extLst>
+          </p:cNvPr>
+          <p:cNvSpPr/>
+          <p:nvPr/>
+        </p:nvSpPr>
+        <p:spPr>
+          <a:xfrm>
+            <a:off x="502920" y="2520000"/>
+            <a:ext cx="2692603" cy="190000"/>
+          </a:xfrm>
+          <a:prstGeom prst="rect">
+            <a:avLst/>
+          </a:prstGeom>
+          <a:noFill/>
+          <a:ln/>
+        </p:spPr>
+        <p:txBody>
+          <a:bodyPr wrap="square" lIns="0" tIns="0" rIns="0" bIns="0" rtlCol="0" anchor="b"/>
+          <a:lstStyle/>
+          <a:p>
+            <a:pPr marL="0" indent="0" algn="ctr">
+              <a:buNone/>
+            </a:pPr>
+            <a:r>
+              <a:rPr lang="en-US" sz="1800" b="1" dirty="0">
+                <a:solidFill>
+                  <a:srgbClr val="1C2B3A"/>
+                </a:solidFill>
+                <a:latin typeface="Garamond" pitchFamily="34" charset="0"/>
+                <a:ea typeface="Garamond" pitchFamily="34" charset="-122"/>
+                <a:cs typeface="Garamond" pitchFamily="34" charset="-120"/>
+              </a:rPr>
+              <a:t>20 Mds€</a:t>
+            </a:r>
+            <a:endParaRPr lang="en-US" sz="1100" dirty="0"/>
+          </a:p>
+        </p:txBody>
+      </p:sp>
+      <p:sp>
+        <p:nvSpPr>
+          <p:cNvPr id="53" name="SL0">
+            <a:extLst>
+              <a:ext uri="{FF2B5EF4-FFF2-40B4-BE49-F238E27FC236}">
+                <a16:creationId xmlns:a16="http://schemas.microsoft.com/office/drawing/2014/main" id="{A1175281-8471-5BD1-28C4-171F33670130}"/>
+              </a:ext>
+            </a:extLst>
+          </p:cNvPr>
+          <p:cNvSpPr/>
+          <p:nvPr/>
+        </p:nvSpPr>
+        <p:spPr>
+          <a:xfrm>
+            <a:off x="502920" y="2710000"/>
+            <a:ext cx="2692603" cy="130000"/>
+          </a:xfrm>
+          <a:prstGeom prst="rect">
+            <a:avLst/>
+          </a:prstGeom>
+          <a:noFill/>
+          <a:ln/>
+        </p:spPr>
+        <p:txBody>
+          <a:bodyPr wrap="square" lIns="0" tIns="0" rIns="0" bIns="0" rtlCol="0" anchor="t"/>
+          <a:lstStyle/>
+          <a:p>
+            <a:pPr marL="0" indent="0" algn="ctr">
+              <a:buNone/>
+            </a:pPr>
+            <a:r>
+              <a:rPr lang="en-US" sz="800" dirty="0">
+                <a:solidFill>
+                  <a:srgbClr val="A09080"/>
+                </a:solidFill>
+                <a:latin typeface="Calibri" pitchFamily="34" charset="0"/>
+                <a:ea typeface="Calibri" pitchFamily="34" charset="-122"/>
+                <a:cs typeface="Calibri" pitchFamily="34" charset="-120"/>
+              </a:rPr>
+              <a:t>AUM</a:t>
+            </a:r>
+            <a:endParaRPr lang="en-US" sz="1100" dirty="0"/>
+          </a:p>
+        </p:txBody>
+      </p:sp>
+      <p:sp>
+        <p:nvSpPr>
+          <p:cNvPr id="55" name="SS0">
+            <a:extLst>
+              <a:ext uri="{FF2B5EF4-FFF2-40B4-BE49-F238E27FC236}">
+                <a16:creationId xmlns:a16="http://schemas.microsoft.com/office/drawing/2014/main" id="{DEEBEA17-D568-E1D4-94D2-05D871B1F58E}"/>
+              </a:ext>
+            </a:extLst>
+          </p:cNvPr>
+          <p:cNvSpPr/>
+          <p:nvPr/>
+        </p:nvSpPr>
+        <p:spPr>
+          <a:xfrm>
+            <a:off x="3195523" y="2520000"/>
+            <a:ext cx="10973" cy="320000"/>
+          </a:xfrm>
+          <a:prstGeom prst="rect">
+            <a:avLst/>
+          </a:prstGeom>
+          <a:solidFill>
+            <a:srgbClr val="CFC8BD"/>
+          </a:solidFill>
+          <a:ln w="12700">
+            <a:solidFill>
+              <a:srgbClr val="CFC8BD"/>
+            </a:solidFill>
+            <a:prstDash val="solid"/>
+          </a:ln>
+        </p:spPr>
+        <p:txBody>
+          <a:bodyPr/>
+          <a:lstStyle/>
+          <a:p>
+            <a:endParaRPr lang="fr-FR"/>
+          </a:p>
+        </p:txBody>
+      </p:sp>
+      <p:sp>
+        <p:nvSpPr>
+          <p:cNvPr id="57" name="SV1">
+            <a:extLst>
+              <a:ext uri="{FF2B5EF4-FFF2-40B4-BE49-F238E27FC236}">
+                <a16:creationId xmlns:a16="http://schemas.microsoft.com/office/drawing/2014/main" id="{85CA9C79-7212-889D-1FB9-93BE28624B31}"/>
+              </a:ext>
+            </a:extLst>
+          </p:cNvPr>
+          <p:cNvSpPr/>
+          <p:nvPr/>
+        </p:nvSpPr>
+        <p:spPr>
+          <a:xfrm>
+            <a:off x="3206496" y="2520000"/>
+            <a:ext cx="2692603" cy="190000"/>
+          </a:xfrm>
+          <a:prstGeom prst="rect">
+            <a:avLst/>
+          </a:prstGeom>
+          <a:noFill/>
+          <a:ln/>
+        </p:spPr>
+        <p:txBody>
+          <a:bodyPr wrap="square" lIns="0" tIns="0" rIns="0" bIns="0" rtlCol="0" anchor="b"/>
+          <a:lstStyle/>
+          <a:p>
+            <a:pPr marL="0" indent="0" algn="ctr">
+              <a:buNone/>
+            </a:pPr>
+            <a:r>
+              <a:rPr lang="en-US" sz="1800" b="1" dirty="0">
+                <a:solidFill>
+                  <a:srgbClr val="1C2B3A"/>
+                </a:solidFill>
+                <a:latin typeface="Garamond" pitchFamily="34" charset="0"/>
+                <a:ea typeface="Garamond" pitchFamily="34" charset="-122"/>
+                <a:cs typeface="Garamond" pitchFamily="34" charset="-120"/>
+              </a:rPr>
+              <a:t>30 ans</a:t>
+            </a:r>
+            <a:endParaRPr lang="en-US" sz="1100" dirty="0"/>
+          </a:p>
+        </p:txBody>
+      </p:sp>
+      <p:sp>
+        <p:nvSpPr>
+          <p:cNvPr id="59" name="SL1">
+            <a:extLst>
+              <a:ext uri="{FF2B5EF4-FFF2-40B4-BE49-F238E27FC236}">
+                <a16:creationId xmlns:a16="http://schemas.microsoft.com/office/drawing/2014/main" id="{13E5B525-C082-3B60-7CF0-1C4D301358BC}"/>
+              </a:ext>
+            </a:extLst>
+          </p:cNvPr>
+          <p:cNvSpPr/>
+          <p:nvPr/>
+        </p:nvSpPr>
+        <p:spPr>
+          <a:xfrm>
+            <a:off x="3206496" y="2710000"/>
+            <a:ext cx="2692603" cy="130000"/>
+          </a:xfrm>
+          <a:prstGeom prst="rect">
+            <a:avLst/>
+          </a:prstGeom>
+          <a:noFill/>
+          <a:ln/>
+        </p:spPr>
+        <p:txBody>
+          <a:bodyPr wrap="square" lIns="0" tIns="0" rIns="0" bIns="0" rtlCol="0" anchor="t"/>
+          <a:lstStyle/>
+          <a:p>
+            <a:pPr marL="0" indent="0" algn="ctr">
+              <a:buNone/>
+            </a:pPr>
+            <a:r>
+              <a:rPr lang="en-US" sz="800" dirty="0">
+                <a:solidFill>
+                  <a:srgbClr val="A09080"/>
+                </a:solidFill>
+                <a:latin typeface="Calibri" pitchFamily="34" charset="0"/>
+                <a:ea typeface="Calibri" pitchFamily="34" charset="-122"/>
+                <a:cs typeface="Calibri" pitchFamily="34" charset="-120"/>
+              </a:rPr>
+              <a:t>d'expérience</a:t>
+            </a:r>
+            <a:endParaRPr lang="en-US" sz="1100" dirty="0"/>
+          </a:p>
+        </p:txBody>
+      </p:sp>
+      <p:sp>
+        <p:nvSpPr>
+          <p:cNvPr id="61" name="SS1">
+            <a:extLst>
+              <a:ext uri="{FF2B5EF4-FFF2-40B4-BE49-F238E27FC236}">
+                <a16:creationId xmlns:a16="http://schemas.microsoft.com/office/drawing/2014/main" id="{B0E39AEB-D971-1C3E-166C-5A862DB43804}"/>
+              </a:ext>
+            </a:extLst>
+          </p:cNvPr>
+          <p:cNvSpPr/>
+          <p:nvPr/>
+        </p:nvSpPr>
+        <p:spPr>
+          <a:xfrm>
+            <a:off x="5899099" y="2520000"/>
+            <a:ext cx="10973" cy="320000"/>
+          </a:xfrm>
+          <a:prstGeom prst="rect">
+            <a:avLst/>
+          </a:prstGeom>
+          <a:solidFill>
+            <a:srgbClr val="CFC8BD"/>
+          </a:solidFill>
+          <a:ln w="12700">
+            <a:solidFill>
+              <a:srgbClr val="CFC8BD"/>
+            </a:solidFill>
+            <a:prstDash val="solid"/>
+          </a:ln>
+        </p:spPr>
+        <p:txBody>
+          <a:bodyPr/>
+          <a:lstStyle/>
+          <a:p>
+            <a:endParaRPr lang="fr-FR"/>
+          </a:p>
+        </p:txBody>
+      </p:sp>
+      <p:sp>
+        <p:nvSpPr>
+          <p:cNvPr id="63" name="SV2">
+            <a:extLst>
+              <a:ext uri="{FF2B5EF4-FFF2-40B4-BE49-F238E27FC236}">
+                <a16:creationId xmlns:a16="http://schemas.microsoft.com/office/drawing/2014/main" id="{8A140DDF-34D9-5452-6F9D-2CFD1E199BF0}"/>
+              </a:ext>
+            </a:extLst>
+          </p:cNvPr>
+          <p:cNvSpPr/>
+          <p:nvPr/>
+        </p:nvSpPr>
+        <p:spPr>
+          <a:xfrm>
+            <a:off x="5910072" y="2520000"/>
+            <a:ext cx="2703576" cy="190000"/>
+          </a:xfrm>
+          <a:prstGeom prst="rect">
+            <a:avLst/>
+          </a:prstGeom>
+          <a:noFill/>
+          <a:ln/>
+        </p:spPr>
+        <p:txBody>
+          <a:bodyPr wrap="square" lIns="0" tIns="0" rIns="0" bIns="0" rtlCol="0" anchor="b"/>
+          <a:lstStyle/>
+          <a:p>
+            <a:pPr marL="0" indent="0" algn="ctr">
+              <a:buNone/>
+            </a:pPr>
+            <a:r>
+              <a:rPr lang="en-US" sz="1800" b="1" dirty="0">
+                <a:solidFill>
+                  <a:srgbClr val="1C2B3A"/>
+                </a:solidFill>
+                <a:latin typeface="Garamond" pitchFamily="34" charset="0"/>
+                <a:ea typeface="Garamond" pitchFamily="34" charset="-122"/>
+                <a:cs typeface="Garamond" pitchFamily="34" charset="-120"/>
+              </a:rPr>
+              <a:t>300 %</a:t>
+            </a:r>
+            <a:endParaRPr lang="en-US" sz="1100" dirty="0"/>
+          </a:p>
+        </p:txBody>
+      </p:sp>
+      <p:sp>
+        <p:nvSpPr>
+          <p:cNvPr id="65" name="SL2">
+            <a:extLst>
+              <a:ext uri="{FF2B5EF4-FFF2-40B4-BE49-F238E27FC236}">
+                <a16:creationId xmlns:a16="http://schemas.microsoft.com/office/drawing/2014/main" id="{EFBC144E-857A-2F28-45F6-839739BFD3DD}"/>
+              </a:ext>
+            </a:extLst>
+          </p:cNvPr>
+          <p:cNvSpPr/>
+          <p:nvPr/>
+        </p:nvSpPr>
+        <p:spPr>
+          <a:xfrm>
+            <a:off x="5910072" y="2710000"/>
+            <a:ext cx="2703576" cy="130000"/>
+          </a:xfrm>
+          <a:prstGeom prst="rect">
+            <a:avLst/>
+          </a:prstGeom>
+          <a:noFill/>
+          <a:ln/>
+        </p:spPr>
+        <p:txBody>
+          <a:bodyPr wrap="square" lIns="0" tIns="0" rIns="0" bIns="0" rtlCol="0" anchor="t"/>
+          <a:lstStyle/>
+          <a:p>
+            <a:pPr marL="0" indent="0" algn="ctr">
+              <a:buNone/>
+            </a:pPr>
+            <a:r>
+              <a:rPr lang="en-US" sz="800" dirty="0">
+                <a:solidFill>
+                  <a:srgbClr val="A09080"/>
+                </a:solidFill>
+                <a:latin typeface="Calibri" pitchFamily="34" charset="0"/>
+                <a:ea typeface="Calibri" pitchFamily="34" charset="-122"/>
+                <a:cs typeface="Calibri" pitchFamily="34" charset="-120"/>
+              </a:rPr>
+              <a:t>solvabilité</a:t>
+            </a:r>
+            <a:endParaRPr lang="en-US" sz="1100" dirty="0"/>
+          </a:p>
+        </p:txBody>
+      </p:sp>
+      <p:sp>
+        <p:nvSpPr>
+          <p:cNvPr id="67" name="BM0">
+            <a:extLst>
+              <a:ext uri="{FF2B5EF4-FFF2-40B4-BE49-F238E27FC236}">
+                <a16:creationId xmlns:a16="http://schemas.microsoft.com/office/drawing/2014/main" id="{B893B66D-F327-1814-D72A-463F4924D13C}"/>
+              </a:ext>
+            </a:extLst>
+          </p:cNvPr>
+          <p:cNvSpPr/>
+          <p:nvPr/>
+        </p:nvSpPr>
+        <p:spPr>
+          <a:xfrm>
+            <a:off x="502920" y="2940000"/>
+            <a:ext cx="22860" cy="340000"/>
+          </a:xfrm>
+          <a:prstGeom prst="rect">
+            <a:avLst/>
+          </a:prstGeom>
+          <a:solidFill>
+            <a:srgbClr val="1C2B3A"/>
+          </a:solidFill>
+          <a:ln w="12700">
+            <a:solidFill>
+              <a:srgbClr val="1C2B3A"/>
+            </a:solidFill>
+            <a:prstDash val="solid"/>
+          </a:ln>
+        </p:spPr>
+        <p:txBody>
+          <a:bodyPr/>
+          <a:lstStyle/>
+          <a:p>
+            <a:endParaRPr lang="fr-FR"/>
+          </a:p>
+        </p:txBody>
+      </p:sp>
+      <p:sp>
+        <p:nvSpPr>
+          <p:cNvPr id="69" name="BT0">
+            <a:extLst>
+              <a:ext uri="{FF2B5EF4-FFF2-40B4-BE49-F238E27FC236}">
+                <a16:creationId xmlns:a16="http://schemas.microsoft.com/office/drawing/2014/main" id="{24F14F30-B548-D411-831A-B9BF4B2F0968}"/>
+              </a:ext>
+            </a:extLst>
+          </p:cNvPr>
+          <p:cNvSpPr/>
+          <p:nvPr/>
+        </p:nvSpPr>
+        <p:spPr>
+          <a:xfrm>
+            <a:off x="658368" y="2940000"/>
+            <a:ext cx="7453200" cy="340000"/>
+          </a:xfrm>
+          <a:prstGeom prst="rect">
+            <a:avLst/>
+          </a:prstGeom>
+          <a:noFill/>
+          <a:ln/>
+        </p:spPr>
+        <p:txBody>
+          <a:bodyPr wrap="square" lIns="0" tIns="0" rIns="0" bIns="0" rtlCol="0" anchor="t"/>
+          <a:lstStyle/>
+          <a:p>
+            <a:pPr marL="0" indent="0">
+              <a:buNone/>
+            </a:pPr>
+            <a:r>
+              <a:rPr lang="en-US" sz="1050" dirty="0">
+                <a:solidFill>
+                  <a:srgbClr val="4A5568"/>
+                </a:solidFill>
+                <a:latin typeface="Calibri" pitchFamily="34" charset="0"/>
+                <a:ea typeface="Calibri" pitchFamily="34" charset="-122"/>
+                <a:cs typeface="Calibri" pitchFamily="34" charset="-120"/>
+              </a:rPr>
+              <a:t>1 Md€ de fonds propres — assureur 100 % luxembourgeois</a:t>
+            </a:r>
+            <a:endParaRPr lang="en-US" sz="1100" dirty="0"/>
+          </a:p>
+        </p:txBody>
+      </p:sp>
+      <p:sp>
+        <p:nvSpPr>
+          <p:cNvPr id="71" name="BM1">
+            <a:extLst>
+              <a:ext uri="{FF2B5EF4-FFF2-40B4-BE49-F238E27FC236}">
+                <a16:creationId xmlns:a16="http://schemas.microsoft.com/office/drawing/2014/main" id="{B8D2EE3B-59D1-9F87-6EB5-DA0743F19021}"/>
+              </a:ext>
+            </a:extLst>
+          </p:cNvPr>
+          <p:cNvSpPr/>
+          <p:nvPr/>
+        </p:nvSpPr>
+        <p:spPr>
+          <a:xfrm>
+            <a:off x="502920" y="3330000"/>
+            <a:ext cx="22860" cy="340000"/>
+          </a:xfrm>
+          <a:prstGeom prst="rect">
+            <a:avLst/>
+          </a:prstGeom>
+          <a:solidFill>
+            <a:srgbClr val="1C2B3A"/>
+          </a:solidFill>
+          <a:ln w="12700">
+            <a:solidFill>
+              <a:srgbClr val="1C2B3A"/>
+            </a:solidFill>
+            <a:prstDash val="solid"/>
+          </a:ln>
+        </p:spPr>
+        <p:txBody>
+          <a:bodyPr/>
+          <a:lstStyle/>
+          <a:p>
+            <a:endParaRPr lang="fr-FR"/>
+          </a:p>
+        </p:txBody>
+      </p:sp>
+      <p:sp>
+        <p:nvSpPr>
+          <p:cNvPr id="73" name="BT1">
+            <a:extLst>
+              <a:ext uri="{FF2B5EF4-FFF2-40B4-BE49-F238E27FC236}">
+                <a16:creationId xmlns:a16="http://schemas.microsoft.com/office/drawing/2014/main" id="{D7DD0245-C868-8510-E2DC-A9C373A3A305}"/>
+              </a:ext>
+            </a:extLst>
+          </p:cNvPr>
+          <p:cNvSpPr/>
+          <p:nvPr/>
+        </p:nvSpPr>
+        <p:spPr>
+          <a:xfrm>
+            <a:off x="658368" y="3330000"/>
+            <a:ext cx="7453200" cy="340000"/>
+          </a:xfrm>
+          <a:prstGeom prst="rect">
+            <a:avLst/>
+          </a:prstGeom>
+          <a:noFill/>
+          <a:ln/>
+        </p:spPr>
+        <p:txBody>
+          <a:bodyPr wrap="square" lIns="0" tIns="0" rIns="0" bIns="0" rtlCol="0" anchor="t"/>
+          <a:lstStyle/>
+          <a:p>
+            <a:pPr marL="0" indent="0">
+              <a:buNone/>
+            </a:pPr>
+            <a:r>
+              <a:rPr lang="en-US" sz="1050" dirty="0">
+                <a:solidFill>
+                  <a:srgbClr val="4A5568"/>
+                </a:solidFill>
+                <a:latin typeface="Calibri" pitchFamily="34" charset="0"/>
+                <a:ea typeface="Calibri" pitchFamily="34" charset="-122"/>
+                <a:cs typeface="Calibri" pitchFamily="34" charset="-120"/>
+              </a:rPr>
+              <a:t>20 milliards € d'actifs sous administration</a:t>
+            </a:r>
+            <a:endParaRPr lang="en-US" sz="1100" dirty="0"/>
+          </a:p>
+        </p:txBody>
+      </p:sp>
+      <p:sp>
+        <p:nvSpPr>
+          <p:cNvPr id="75" name="BM2">
+            <a:extLst>
+              <a:ext uri="{FF2B5EF4-FFF2-40B4-BE49-F238E27FC236}">
+                <a16:creationId xmlns:a16="http://schemas.microsoft.com/office/drawing/2014/main" id="{13B7F521-C4EF-5F61-B569-F7FEBB215476}"/>
+              </a:ext>
+            </a:extLst>
+          </p:cNvPr>
+          <p:cNvSpPr/>
+          <p:nvPr/>
+        </p:nvSpPr>
+        <p:spPr>
+          <a:xfrm>
+            <a:off x="502920" y="3720000"/>
+            <a:ext cx="22860" cy="340000"/>
+          </a:xfrm>
+          <a:prstGeom prst="rect">
+            <a:avLst/>
+          </a:prstGeom>
+          <a:solidFill>
+            <a:srgbClr val="1C2B3A"/>
+          </a:solidFill>
+          <a:ln w="12700">
+            <a:solidFill>
+              <a:srgbClr val="1C2B3A"/>
+            </a:solidFill>
+            <a:prstDash val="solid"/>
+          </a:ln>
+        </p:spPr>
+        <p:txBody>
+          <a:bodyPr/>
+          <a:lstStyle/>
+          <a:p>
+            <a:endParaRPr lang="fr-FR"/>
+          </a:p>
+        </p:txBody>
+      </p:sp>
+      <p:sp>
+        <p:nvSpPr>
+          <p:cNvPr id="77" name="BT2">
+            <a:extLst>
+              <a:ext uri="{FF2B5EF4-FFF2-40B4-BE49-F238E27FC236}">
+                <a16:creationId xmlns:a16="http://schemas.microsoft.com/office/drawing/2014/main" id="{B720BC1F-D5CE-6591-D05B-CB14701F124E}"/>
+              </a:ext>
+            </a:extLst>
+          </p:cNvPr>
+          <p:cNvSpPr/>
+          <p:nvPr/>
+        </p:nvSpPr>
+        <p:spPr>
+          <a:xfrm>
+            <a:off x="658368" y="3720000"/>
+            <a:ext cx="7453200" cy="340000"/>
+          </a:xfrm>
+          <a:prstGeom prst="rect">
+            <a:avLst/>
+          </a:prstGeom>
+          <a:noFill/>
+          <a:ln/>
+        </p:spPr>
+        <p:txBody>
+          <a:bodyPr wrap="square" lIns="0" tIns="0" rIns="0" bIns="0" rtlCol="0" anchor="t"/>
+          <a:lstStyle/>
+          <a:p>
+            <a:pPr marL="0" indent="0">
+              <a:buNone/>
+            </a:pPr>
+            <a:r>
+              <a:rPr lang="en-US" sz="1050" dirty="0">
+                <a:solidFill>
+                  <a:srgbClr val="4A5568"/>
+                </a:solidFill>
+                <a:latin typeface="Calibri" pitchFamily="34" charset="0"/>
+                <a:ea typeface="Calibri" pitchFamily="34" charset="-122"/>
+                <a:cs typeface="Calibri" pitchFamily="34" charset="-120"/>
+              </a:rPr>
+              <a:t>Actif sur plus de 10 marchés européens depuis 30 ans</a:t>
+            </a:r>
+            <a:endParaRPr lang="en-US" sz="1100" dirty="0"/>
+          </a:p>
+        </p:txBody>
+      </p:sp>
+      <p:sp>
+        <p:nvSpPr>
+          <p:cNvPr id="79" name="BM3">
+            <a:extLst>
+              <a:ext uri="{FF2B5EF4-FFF2-40B4-BE49-F238E27FC236}">
+                <a16:creationId xmlns:a16="http://schemas.microsoft.com/office/drawing/2014/main" id="{21751192-3FBC-C554-94A6-C07FFB2F48EF}"/>
+              </a:ext>
+            </a:extLst>
+          </p:cNvPr>
+          <p:cNvSpPr/>
+          <p:nvPr/>
+        </p:nvSpPr>
+        <p:spPr>
+          <a:xfrm>
+            <a:off x="502920" y="4110000"/>
+            <a:ext cx="22860" cy="340000"/>
+          </a:xfrm>
+          <a:prstGeom prst="rect">
+            <a:avLst/>
+          </a:prstGeom>
+          <a:solidFill>
+            <a:srgbClr val="1C2B3A"/>
+          </a:solidFill>
+          <a:ln w="12700">
+            <a:solidFill>
+              <a:srgbClr val="1C2B3A"/>
+            </a:solidFill>
+            <a:prstDash val="solid"/>
+          </a:ln>
+        </p:spPr>
+        <p:txBody>
+          <a:bodyPr/>
+          <a:lstStyle/>
+          <a:p>
+            <a:endParaRPr lang="fr-FR"/>
+          </a:p>
+        </p:txBody>
+      </p:sp>
+      <p:sp>
+        <p:nvSpPr>
+          <p:cNvPr id="81" name="BT3">
+            <a:extLst>
+              <a:ext uri="{FF2B5EF4-FFF2-40B4-BE49-F238E27FC236}">
+                <a16:creationId xmlns:a16="http://schemas.microsoft.com/office/drawing/2014/main" id="{48DC2F8F-9A87-BB38-31B6-2A9083B87E7F}"/>
+              </a:ext>
+            </a:extLst>
+          </p:cNvPr>
+          <p:cNvSpPr/>
+          <p:nvPr/>
+        </p:nvSpPr>
+        <p:spPr>
+          <a:xfrm>
+            <a:off x="658368" y="4110000"/>
+            <a:ext cx="7453200" cy="340000"/>
+          </a:xfrm>
+          <a:prstGeom prst="rect">
+            <a:avLst/>
+          </a:prstGeom>
+          <a:noFill/>
+          <a:ln/>
+        </p:spPr>
+        <p:txBody>
+          <a:bodyPr wrap="square" lIns="0" tIns="0" rIns="0" bIns="0" rtlCol="0" anchor="t"/>
+          <a:lstStyle/>
+          <a:p>
+            <a:pPr marL="0" indent="0">
+              <a:buNone/>
+            </a:pPr>
+            <a:r>
+              <a:rPr lang="en-US" sz="1050" dirty="0">
+                <a:solidFill>
+                  <a:srgbClr val="4A5568"/>
+                </a:solidFill>
+                <a:latin typeface="Calibri" pitchFamily="34" charset="0"/>
+                <a:ea typeface="Calibri" pitchFamily="34" charset="-122"/>
+                <a:cs typeface="Calibri" pitchFamily="34" charset="-120"/>
+              </a:rPr>
+              <a:t>Back-office francophone dédié, interlocuteur dédié Affilior</a:t>
+            </a:r>
+            <a:endParaRPr lang="en-US" sz="1100" dirty="0"/>
+          </a:p>
+        </p:txBody>
+      </p:sp>
+      <p:sp>
+        <p:nvSpPr>
+          <p:cNvPr id="83" name="BM4">
+            <a:extLst>
+              <a:ext uri="{FF2B5EF4-FFF2-40B4-BE49-F238E27FC236}">
+                <a16:creationId xmlns:a16="http://schemas.microsoft.com/office/drawing/2014/main" id="{B4FC362C-5111-8E06-FA99-6B1BDBF2E195}"/>
+              </a:ext>
+            </a:extLst>
+          </p:cNvPr>
+          <p:cNvSpPr/>
+          <p:nvPr/>
+        </p:nvSpPr>
+        <p:spPr>
+          <a:xfrm>
+            <a:off x="502920" y="4500000"/>
+            <a:ext cx="22860" cy="340000"/>
+          </a:xfrm>
+          <a:prstGeom prst="rect">
+            <a:avLst/>
+          </a:prstGeom>
+          <a:solidFill>
+            <a:srgbClr val="1C2B3A"/>
+          </a:solidFill>
+          <a:ln w="12700">
+            <a:solidFill>
+              <a:srgbClr val="1C2B3A"/>
+            </a:solidFill>
+            <a:prstDash val="solid"/>
+          </a:ln>
+        </p:spPr>
+        <p:txBody>
+          <a:bodyPr/>
+          <a:lstStyle/>
+          <a:p>
+            <a:endParaRPr lang="fr-FR"/>
+          </a:p>
+        </p:txBody>
+      </p:sp>
+      <p:sp>
+        <p:nvSpPr>
+          <p:cNvPr id="85" name="BT4">
+            <a:extLst>
+              <a:ext uri="{FF2B5EF4-FFF2-40B4-BE49-F238E27FC236}">
+                <a16:creationId xmlns:a16="http://schemas.microsoft.com/office/drawing/2014/main" id="{E48368D1-F153-0580-C9C1-54131D2FA94B}"/>
+              </a:ext>
+            </a:extLst>
+          </p:cNvPr>
+          <p:cNvSpPr/>
+          <p:nvPr/>
+        </p:nvSpPr>
+        <p:spPr>
+          <a:xfrm>
+            <a:off x="658368" y="4500000"/>
+            <a:ext cx="7453200" cy="340000"/>
+          </a:xfrm>
+          <a:prstGeom prst="rect">
+            <a:avLst/>
+          </a:prstGeom>
+          <a:noFill/>
+          <a:ln/>
+        </p:spPr>
+        <p:txBody>
+          <a:bodyPr wrap="square" lIns="0" tIns="0" rIns="0" bIns="0" rtlCol="0" anchor="t"/>
+          <a:lstStyle/>
+          <a:p>
+            <a:pPr marL="0" indent="0">
+              <a:buNone/>
+            </a:pPr>
+            <a:r>
+              <a:rPr lang="en-US" sz="1050" dirty="0">
+                <a:solidFill>
+                  <a:srgbClr val="4A5568"/>
+                </a:solidFill>
+                <a:latin typeface="Calibri" pitchFamily="34" charset="0"/>
+                <a:ea typeface="Calibri" pitchFamily="34" charset="-122"/>
+                <a:cs typeface="Calibri" pitchFamily="34" charset="-120"/>
+              </a:rPr>
+              <a:t>Large choix d'architecture ouverte en gestion</a:t>
+            </a:r>
+            <a:endParaRPr lang="en-US" sz="1100" dirty="0"/>
+          </a:p>
+        </p:txBody>
+      </p:sp>
+      <p:sp>
+        <p:nvSpPr>
+          <p:cNvPr id="87" name="Footer">
+            <a:extLst>
+              <a:ext uri="{FF2B5EF4-FFF2-40B4-BE49-F238E27FC236}">
+                <a16:creationId xmlns:a16="http://schemas.microsoft.com/office/drawing/2014/main" id="{D3E6CFC2-C8AA-5348-CE5A-A796D39714D9}"/>
+              </a:ext>
+            </a:extLst>
+          </p:cNvPr>
+          <p:cNvSpPr/>
+          <p:nvPr/>
+        </p:nvSpPr>
+        <p:spPr>
+          <a:xfrm>
+            <a:off x="2560320" y="5001768"/>
+            <a:ext cx="6080760" cy="118872"/>
+          </a:xfrm>
+          <a:prstGeom prst="rect">
+            <a:avLst/>
+          </a:prstGeom>
+          <a:noFill/>
+          <a:ln/>
+        </p:spPr>
+        <p:txBody>
+          <a:bodyPr wrap="square" lIns="0" tIns="0" rIns="0" bIns="0" rtlCol="0" anchor="ctr"/>
+          <a:lstStyle/>
+          <a:p>
+            <a:pPr marL="0" indent="0" algn="ctr">
+              <a:buNone/>
+            </a:pPr>
+            <a:r>
+              <a:rPr lang="en-US" sz="680" i="1" dirty="0">
+                <a:solidFill>
+                  <a:srgbClr val="A09080"/>
+                </a:solidFill>
+                <a:latin typeface="Calibri" pitchFamily="34" charset="0"/>
+                <a:ea typeface="Calibri" pitchFamily="34" charset="-122"/>
+                <a:cs typeface="Calibri" pitchFamily="34" charset="-120"/>
+              </a:rPr>
+              <a:t>Affilior Gestion Privée  ·  Confidentiel  ·  Août 2026  ·  Ce document ne constitue pas un conseil en investissement au sens MIF2</a:t>
+            </a:r>
+            <a:endParaRPr lang="en-US" sz="1100" dirty="0"/>
+          </a:p>
+        </p:txBody>
+      </p:sp>
+      <p:sp>
+        <p:nvSpPr>
+          <p:cNvPr id="89" name="PageNum">
+            <a:extLst>
+              <a:ext uri="{FF2B5EF4-FFF2-40B4-BE49-F238E27FC236}">
+                <a16:creationId xmlns:a16="http://schemas.microsoft.com/office/drawing/2014/main" id="{464A0250-CA00-F3B3-55D5-4D4958FCC45E}"/>
+              </a:ext>
+            </a:extLst>
+          </p:cNvPr>
+          <p:cNvSpPr/>
+          <p:nvPr/>
+        </p:nvSpPr>
+        <p:spPr>
+          <a:xfrm>
+            <a:off x="8100000" y="228600"/>
+            <a:ext cx="400000" cy="182880"/>
+          </a:xfrm>
+          <a:prstGeom prst="rect">
+            <a:avLst/>
+          </a:prstGeom>
+          <a:noFill/>
+          <a:ln/>
+        </p:spPr>
+        <p:txBody>
+          <a:bodyPr wrap="square" lIns="0" tIns="0" rIns="0" bIns="0" rtlCol="0" anchor="ctr"/>
+          <a:lstStyle/>
+          <a:p>
+            <a:pPr marL="0" indent="0" algn="r">
+              <a:buNone/>
+            </a:pPr>
+            <a:fld id="{10FAF57D-9689-440F-9950-4AB2FA11F867}" type="slidenum">
+              <a:rPr lang="en-US" sz="900" dirty="0">
+                <a:solidFill>
+                  <a:srgbClr val="A09080"/>
+                </a:solidFill>
+                <a:latin typeface="Garamond" pitchFamily="34" charset="0"/>
+              </a:rPr>
+              <a:t>7</a:t>
+            </a:fld>
+            <a:endParaRPr lang="en-US" sz="900" dirty="0"/>
+          </a:p>
+        </p:txBody>
+      </p:sp>
       <p:pic>
         <p:nvPicPr>
-          <p:cNvPr id="49" name="LogoPartner" descr="logo.png">
+          <p:cNvPr id="3" name="Image 2">
             <a:extLst>
               <a:ext uri="{FF2B5EF4-FFF2-40B4-BE49-F238E27FC236}">
-                <a16:creationId xmlns:a16="http://schemas.microsoft.com/office/drawing/2014/main" id="{527D98D5-EDAE-2F13-F298-B551875C66A0}"/>
+                <a16:creationId xmlns:a16="http://schemas.microsoft.com/office/drawing/2014/main" id="{B4698F47-5031-B78D-1E38-5A743D63D76B}"/>
               </a:ext>
             </a:extLst>
           </p:cNvPr>
@@ -60823,863 +61804,14 @@
         </p:blipFill>
         <p:spPr>
           <a:xfrm>
-            <a:off x="3884842" y="1550000"/>
-            <a:ext cx="1374315" cy="680000"/>
+            <a:off x="3376749" y="1306610"/>
+            <a:ext cx="2125936" cy="1051894"/>
           </a:xfrm>
           <a:prstGeom prst="rect">
             <a:avLst/>
           </a:prstGeom>
         </p:spPr>
       </p:pic>
-      <p:sp>
-        <p:nvSpPr>
-          <p:cNvPr id="51" name="SV0">
-            <a:extLst>
-              <a:ext uri="{FF2B5EF4-FFF2-40B4-BE49-F238E27FC236}">
-                <a16:creationId xmlns:a16="http://schemas.microsoft.com/office/drawing/2014/main" id="{1183C48B-C28D-7AED-DBF6-B425E63B12A4}"/>
-              </a:ext>
-            </a:extLst>
-          </p:cNvPr>
-          <p:cNvSpPr/>
-          <p:nvPr/>
-        </p:nvSpPr>
-        <p:spPr>
-          <a:xfrm>
-            <a:off x="502920" y="2520000"/>
-            <a:ext cx="2692603" cy="190000"/>
-          </a:xfrm>
-          <a:prstGeom prst="rect">
-            <a:avLst/>
-          </a:prstGeom>
-          <a:noFill/>
-          <a:ln/>
-        </p:spPr>
-        <p:txBody>
-          <a:bodyPr wrap="square" lIns="0" tIns="0" rIns="0" bIns="0" rtlCol="0" anchor="b"/>
-          <a:lstStyle/>
-          <a:p>
-            <a:pPr marL="0" indent="0" algn="ctr">
-              <a:buNone/>
-            </a:pPr>
-            <a:r>
-              <a:rPr lang="en-US" sz="1800" b="1" dirty="0">
-                <a:solidFill>
-                  <a:srgbClr val="1C2B3A"/>
-                </a:solidFill>
-                <a:latin typeface="Garamond" pitchFamily="34" charset="0"/>
-                <a:ea typeface="Garamond" pitchFamily="34" charset="-122"/>
-                <a:cs typeface="Garamond" pitchFamily="34" charset="-120"/>
-              </a:rPr>
-              <a:t>20 Mds€</a:t>
-            </a:r>
-            <a:endParaRPr lang="en-US" sz="1100" dirty="0"/>
-          </a:p>
-        </p:txBody>
-      </p:sp>
-      <p:sp>
-        <p:nvSpPr>
-          <p:cNvPr id="53" name="SL0">
-            <a:extLst>
-              <a:ext uri="{FF2B5EF4-FFF2-40B4-BE49-F238E27FC236}">
-                <a16:creationId xmlns:a16="http://schemas.microsoft.com/office/drawing/2014/main" id="{A1175281-8471-5BD1-28C4-171F33670130}"/>
-              </a:ext>
-            </a:extLst>
-          </p:cNvPr>
-          <p:cNvSpPr/>
-          <p:nvPr/>
-        </p:nvSpPr>
-        <p:spPr>
-          <a:xfrm>
-            <a:off x="502920" y="2710000"/>
-            <a:ext cx="2692603" cy="130000"/>
-          </a:xfrm>
-          <a:prstGeom prst="rect">
-            <a:avLst/>
-          </a:prstGeom>
-          <a:noFill/>
-          <a:ln/>
-        </p:spPr>
-        <p:txBody>
-          <a:bodyPr wrap="square" lIns="0" tIns="0" rIns="0" bIns="0" rtlCol="0" anchor="t"/>
-          <a:lstStyle/>
-          <a:p>
-            <a:pPr marL="0" indent="0" algn="ctr">
-              <a:buNone/>
-            </a:pPr>
-            <a:r>
-              <a:rPr lang="en-US" sz="800" dirty="0">
-                <a:solidFill>
-                  <a:srgbClr val="A09080"/>
-                </a:solidFill>
-                <a:latin typeface="Calibri" pitchFamily="34" charset="0"/>
-                <a:ea typeface="Calibri" pitchFamily="34" charset="-122"/>
-                <a:cs typeface="Calibri" pitchFamily="34" charset="-120"/>
-              </a:rPr>
-              <a:t>AUM</a:t>
-            </a:r>
-            <a:endParaRPr lang="en-US" sz="1100" dirty="0"/>
-          </a:p>
-        </p:txBody>
-      </p:sp>
-      <p:sp>
-        <p:nvSpPr>
-          <p:cNvPr id="55" name="SS0">
-            <a:extLst>
-              <a:ext uri="{FF2B5EF4-FFF2-40B4-BE49-F238E27FC236}">
-                <a16:creationId xmlns:a16="http://schemas.microsoft.com/office/drawing/2014/main" id="{DEEBEA17-D568-E1D4-94D2-05D871B1F58E}"/>
-              </a:ext>
-            </a:extLst>
-          </p:cNvPr>
-          <p:cNvSpPr/>
-          <p:nvPr/>
-        </p:nvSpPr>
-        <p:spPr>
-          <a:xfrm>
-            <a:off x="3195523" y="2520000"/>
-            <a:ext cx="10973" cy="320000"/>
-          </a:xfrm>
-          <a:prstGeom prst="rect">
-            <a:avLst/>
-          </a:prstGeom>
-          <a:solidFill>
-            <a:srgbClr val="CFC8BD"/>
-          </a:solidFill>
-          <a:ln w="12700">
-            <a:solidFill>
-              <a:srgbClr val="CFC8BD"/>
-            </a:solidFill>
-            <a:prstDash val="solid"/>
-          </a:ln>
-        </p:spPr>
-        <p:txBody>
-          <a:bodyPr/>
-          <a:lstStyle/>
-          <a:p>
-            <a:endParaRPr lang="fr-FR"/>
-          </a:p>
-        </p:txBody>
-      </p:sp>
-      <p:sp>
-        <p:nvSpPr>
-          <p:cNvPr id="57" name="SV1">
-            <a:extLst>
-              <a:ext uri="{FF2B5EF4-FFF2-40B4-BE49-F238E27FC236}">
-                <a16:creationId xmlns:a16="http://schemas.microsoft.com/office/drawing/2014/main" id="{85CA9C79-7212-889D-1FB9-93BE28624B31}"/>
-              </a:ext>
-            </a:extLst>
-          </p:cNvPr>
-          <p:cNvSpPr/>
-          <p:nvPr/>
-        </p:nvSpPr>
-        <p:spPr>
-          <a:xfrm>
-            <a:off x="3206496" y="2520000"/>
-            <a:ext cx="2692603" cy="190000"/>
-          </a:xfrm>
-          <a:prstGeom prst="rect">
-            <a:avLst/>
-          </a:prstGeom>
-          <a:noFill/>
-          <a:ln/>
-        </p:spPr>
-        <p:txBody>
-          <a:bodyPr wrap="square" lIns="0" tIns="0" rIns="0" bIns="0" rtlCol="0" anchor="b"/>
-          <a:lstStyle/>
-          <a:p>
-            <a:pPr marL="0" indent="0" algn="ctr">
-              <a:buNone/>
-            </a:pPr>
-            <a:r>
-              <a:rPr lang="en-US" sz="1800" b="1" dirty="0">
-                <a:solidFill>
-                  <a:srgbClr val="1C2B3A"/>
-                </a:solidFill>
-                <a:latin typeface="Garamond" pitchFamily="34" charset="0"/>
-                <a:ea typeface="Garamond" pitchFamily="34" charset="-122"/>
-                <a:cs typeface="Garamond" pitchFamily="34" charset="-120"/>
-              </a:rPr>
-              <a:t>30 ans</a:t>
-            </a:r>
-            <a:endParaRPr lang="en-US" sz="1100" dirty="0"/>
-          </a:p>
-        </p:txBody>
-      </p:sp>
-      <p:sp>
-        <p:nvSpPr>
-          <p:cNvPr id="59" name="SL1">
-            <a:extLst>
-              <a:ext uri="{FF2B5EF4-FFF2-40B4-BE49-F238E27FC236}">
-                <a16:creationId xmlns:a16="http://schemas.microsoft.com/office/drawing/2014/main" id="{13E5B525-C082-3B60-7CF0-1C4D301358BC}"/>
-              </a:ext>
-            </a:extLst>
-          </p:cNvPr>
-          <p:cNvSpPr/>
-          <p:nvPr/>
-        </p:nvSpPr>
-        <p:spPr>
-          <a:xfrm>
-            <a:off x="3206496" y="2710000"/>
-            <a:ext cx="2692603" cy="130000"/>
-          </a:xfrm>
-          <a:prstGeom prst="rect">
-            <a:avLst/>
-          </a:prstGeom>
-          <a:noFill/>
-          <a:ln/>
-        </p:spPr>
-        <p:txBody>
-          <a:bodyPr wrap="square" lIns="0" tIns="0" rIns="0" bIns="0" rtlCol="0" anchor="t"/>
-          <a:lstStyle/>
-          <a:p>
-            <a:pPr marL="0" indent="0" algn="ctr">
-              <a:buNone/>
-            </a:pPr>
-            <a:r>
-              <a:rPr lang="en-US" sz="800" dirty="0">
-                <a:solidFill>
-                  <a:srgbClr val="A09080"/>
-                </a:solidFill>
-                <a:latin typeface="Calibri" pitchFamily="34" charset="0"/>
-                <a:ea typeface="Calibri" pitchFamily="34" charset="-122"/>
-                <a:cs typeface="Calibri" pitchFamily="34" charset="-120"/>
-              </a:rPr>
-              <a:t>d'expérience</a:t>
-            </a:r>
-            <a:endParaRPr lang="en-US" sz="1100" dirty="0"/>
-          </a:p>
-        </p:txBody>
-      </p:sp>
-      <p:sp>
-        <p:nvSpPr>
-          <p:cNvPr id="61" name="SS1">
-            <a:extLst>
-              <a:ext uri="{FF2B5EF4-FFF2-40B4-BE49-F238E27FC236}">
-                <a16:creationId xmlns:a16="http://schemas.microsoft.com/office/drawing/2014/main" id="{B0E39AEB-D971-1C3E-166C-5A862DB43804}"/>
-              </a:ext>
-            </a:extLst>
-          </p:cNvPr>
-          <p:cNvSpPr/>
-          <p:nvPr/>
-        </p:nvSpPr>
-        <p:spPr>
-          <a:xfrm>
-            <a:off x="5899099" y="2520000"/>
-            <a:ext cx="10973" cy="320000"/>
-          </a:xfrm>
-          <a:prstGeom prst="rect">
-            <a:avLst/>
-          </a:prstGeom>
-          <a:solidFill>
-            <a:srgbClr val="CFC8BD"/>
-          </a:solidFill>
-          <a:ln w="12700">
-            <a:solidFill>
-              <a:srgbClr val="CFC8BD"/>
-            </a:solidFill>
-            <a:prstDash val="solid"/>
-          </a:ln>
-        </p:spPr>
-        <p:txBody>
-          <a:bodyPr/>
-          <a:lstStyle/>
-          <a:p>
-            <a:endParaRPr lang="fr-FR"/>
-          </a:p>
-        </p:txBody>
-      </p:sp>
-      <p:sp>
-        <p:nvSpPr>
-          <p:cNvPr id="63" name="SV2">
-            <a:extLst>
-              <a:ext uri="{FF2B5EF4-FFF2-40B4-BE49-F238E27FC236}">
-                <a16:creationId xmlns:a16="http://schemas.microsoft.com/office/drawing/2014/main" id="{8A140DDF-34D9-5452-6F9D-2CFD1E199BF0}"/>
-              </a:ext>
-            </a:extLst>
-          </p:cNvPr>
-          <p:cNvSpPr/>
-          <p:nvPr/>
-        </p:nvSpPr>
-        <p:spPr>
-          <a:xfrm>
-            <a:off x="5910072" y="2520000"/>
-            <a:ext cx="2703576" cy="190000"/>
-          </a:xfrm>
-          <a:prstGeom prst="rect">
-            <a:avLst/>
-          </a:prstGeom>
-          <a:noFill/>
-          <a:ln/>
-        </p:spPr>
-        <p:txBody>
-          <a:bodyPr wrap="square" lIns="0" tIns="0" rIns="0" bIns="0" rtlCol="0" anchor="b"/>
-          <a:lstStyle/>
-          <a:p>
-            <a:pPr marL="0" indent="0" algn="ctr">
-              <a:buNone/>
-            </a:pPr>
-            <a:r>
-              <a:rPr lang="en-US" sz="1800" b="1" dirty="0">
-                <a:solidFill>
-                  <a:srgbClr val="1C2B3A"/>
-                </a:solidFill>
-                <a:latin typeface="Garamond" pitchFamily="34" charset="0"/>
-                <a:ea typeface="Garamond" pitchFamily="34" charset="-122"/>
-                <a:cs typeface="Garamond" pitchFamily="34" charset="-120"/>
-              </a:rPr>
-              <a:t>300 %</a:t>
-            </a:r>
-            <a:endParaRPr lang="en-US" sz="1100" dirty="0"/>
-          </a:p>
-        </p:txBody>
-      </p:sp>
-      <p:sp>
-        <p:nvSpPr>
-          <p:cNvPr id="65" name="SL2">
-            <a:extLst>
-              <a:ext uri="{FF2B5EF4-FFF2-40B4-BE49-F238E27FC236}">
-                <a16:creationId xmlns:a16="http://schemas.microsoft.com/office/drawing/2014/main" id="{EFBC144E-857A-2F28-45F6-839739BFD3DD}"/>
-              </a:ext>
-            </a:extLst>
-          </p:cNvPr>
-          <p:cNvSpPr/>
-          <p:nvPr/>
-        </p:nvSpPr>
-        <p:spPr>
-          <a:xfrm>
-            <a:off x="5910072" y="2710000"/>
-            <a:ext cx="2703576" cy="130000"/>
-          </a:xfrm>
-          <a:prstGeom prst="rect">
-            <a:avLst/>
-          </a:prstGeom>
-          <a:noFill/>
-          <a:ln/>
-        </p:spPr>
-        <p:txBody>
-          <a:bodyPr wrap="square" lIns="0" tIns="0" rIns="0" bIns="0" rtlCol="0" anchor="t"/>
-          <a:lstStyle/>
-          <a:p>
-            <a:pPr marL="0" indent="0" algn="ctr">
-              <a:buNone/>
-            </a:pPr>
-            <a:r>
-              <a:rPr lang="en-US" sz="800" dirty="0">
-                <a:solidFill>
-                  <a:srgbClr val="A09080"/>
-                </a:solidFill>
-                <a:latin typeface="Calibri" pitchFamily="34" charset="0"/>
-                <a:ea typeface="Calibri" pitchFamily="34" charset="-122"/>
-                <a:cs typeface="Calibri" pitchFamily="34" charset="-120"/>
-              </a:rPr>
-              <a:t>solvabilité</a:t>
-            </a:r>
-            <a:endParaRPr lang="en-US" sz="1100" dirty="0"/>
-          </a:p>
-        </p:txBody>
-      </p:sp>
-      <p:sp>
-        <p:nvSpPr>
-          <p:cNvPr id="67" name="BM0">
-            <a:extLst>
-              <a:ext uri="{FF2B5EF4-FFF2-40B4-BE49-F238E27FC236}">
-                <a16:creationId xmlns:a16="http://schemas.microsoft.com/office/drawing/2014/main" id="{B893B66D-F327-1814-D72A-463F4924D13C}"/>
-              </a:ext>
-            </a:extLst>
-          </p:cNvPr>
-          <p:cNvSpPr/>
-          <p:nvPr/>
-        </p:nvSpPr>
-        <p:spPr>
-          <a:xfrm>
-            <a:off x="502920" y="2940000"/>
-            <a:ext cx="22860" cy="340000"/>
-          </a:xfrm>
-          <a:prstGeom prst="rect">
-            <a:avLst/>
-          </a:prstGeom>
-          <a:solidFill>
-            <a:srgbClr val="1C2B3A"/>
-          </a:solidFill>
-          <a:ln w="12700">
-            <a:solidFill>
-              <a:srgbClr val="1C2B3A"/>
-            </a:solidFill>
-            <a:prstDash val="solid"/>
-          </a:ln>
-        </p:spPr>
-        <p:txBody>
-          <a:bodyPr/>
-          <a:lstStyle/>
-          <a:p>
-            <a:endParaRPr lang="fr-FR"/>
-          </a:p>
-        </p:txBody>
-      </p:sp>
-      <p:sp>
-        <p:nvSpPr>
-          <p:cNvPr id="69" name="BT0">
-            <a:extLst>
-              <a:ext uri="{FF2B5EF4-FFF2-40B4-BE49-F238E27FC236}">
-                <a16:creationId xmlns:a16="http://schemas.microsoft.com/office/drawing/2014/main" id="{24F14F30-B548-D411-831A-B9BF4B2F0968}"/>
-              </a:ext>
-            </a:extLst>
-          </p:cNvPr>
-          <p:cNvSpPr/>
-          <p:nvPr/>
-        </p:nvSpPr>
-        <p:spPr>
-          <a:xfrm>
-            <a:off x="658368" y="2940000"/>
-            <a:ext cx="7453200" cy="340000"/>
-          </a:xfrm>
-          <a:prstGeom prst="rect">
-            <a:avLst/>
-          </a:prstGeom>
-          <a:noFill/>
-          <a:ln/>
-        </p:spPr>
-        <p:txBody>
-          <a:bodyPr wrap="square" lIns="0" tIns="0" rIns="0" bIns="0" rtlCol="0" anchor="t"/>
-          <a:lstStyle/>
-          <a:p>
-            <a:pPr marL="0" indent="0">
-              <a:buNone/>
-            </a:pPr>
-            <a:r>
-              <a:rPr lang="en-US" sz="1050" dirty="0">
-                <a:solidFill>
-                  <a:srgbClr val="4A5568"/>
-                </a:solidFill>
-                <a:latin typeface="Calibri" pitchFamily="34" charset="0"/>
-                <a:ea typeface="Calibri" pitchFamily="34" charset="-122"/>
-                <a:cs typeface="Calibri" pitchFamily="34" charset="-120"/>
-              </a:rPr>
-              <a:t>1 Md€ de fonds propres — assureur 100 % luxembourgeois</a:t>
-            </a:r>
-            <a:endParaRPr lang="en-US" sz="1100" dirty="0"/>
-          </a:p>
-        </p:txBody>
-      </p:sp>
-      <p:sp>
-        <p:nvSpPr>
-          <p:cNvPr id="71" name="BM1">
-            <a:extLst>
-              <a:ext uri="{FF2B5EF4-FFF2-40B4-BE49-F238E27FC236}">
-                <a16:creationId xmlns:a16="http://schemas.microsoft.com/office/drawing/2014/main" id="{B8D2EE3B-59D1-9F87-6EB5-DA0743F19021}"/>
-              </a:ext>
-            </a:extLst>
-          </p:cNvPr>
-          <p:cNvSpPr/>
-          <p:nvPr/>
-        </p:nvSpPr>
-        <p:spPr>
-          <a:xfrm>
-            <a:off x="502920" y="3330000"/>
-            <a:ext cx="22860" cy="340000"/>
-          </a:xfrm>
-          <a:prstGeom prst="rect">
-            <a:avLst/>
-          </a:prstGeom>
-          <a:solidFill>
-            <a:srgbClr val="1C2B3A"/>
-          </a:solidFill>
-          <a:ln w="12700">
-            <a:solidFill>
-              <a:srgbClr val="1C2B3A"/>
-            </a:solidFill>
-            <a:prstDash val="solid"/>
-          </a:ln>
-        </p:spPr>
-        <p:txBody>
-          <a:bodyPr/>
-          <a:lstStyle/>
-          <a:p>
-            <a:endParaRPr lang="fr-FR"/>
-          </a:p>
-        </p:txBody>
-      </p:sp>
-      <p:sp>
-        <p:nvSpPr>
-          <p:cNvPr id="73" name="BT1">
-            <a:extLst>
-              <a:ext uri="{FF2B5EF4-FFF2-40B4-BE49-F238E27FC236}">
-                <a16:creationId xmlns:a16="http://schemas.microsoft.com/office/drawing/2014/main" id="{D7DD0245-C868-8510-E2DC-A9C373A3A305}"/>
-              </a:ext>
-            </a:extLst>
-          </p:cNvPr>
-          <p:cNvSpPr/>
-          <p:nvPr/>
-        </p:nvSpPr>
-        <p:spPr>
-          <a:xfrm>
-            <a:off x="658368" y="3330000"/>
-            <a:ext cx="7453200" cy="340000"/>
-          </a:xfrm>
-          <a:prstGeom prst="rect">
-            <a:avLst/>
-          </a:prstGeom>
-          <a:noFill/>
-          <a:ln/>
-        </p:spPr>
-        <p:txBody>
-          <a:bodyPr wrap="square" lIns="0" tIns="0" rIns="0" bIns="0" rtlCol="0" anchor="t"/>
-          <a:lstStyle/>
-          <a:p>
-            <a:pPr marL="0" indent="0">
-              <a:buNone/>
-            </a:pPr>
-            <a:r>
-              <a:rPr lang="en-US" sz="1050" dirty="0">
-                <a:solidFill>
-                  <a:srgbClr val="4A5568"/>
-                </a:solidFill>
-                <a:latin typeface="Calibri" pitchFamily="34" charset="0"/>
-                <a:ea typeface="Calibri" pitchFamily="34" charset="-122"/>
-                <a:cs typeface="Calibri" pitchFamily="34" charset="-120"/>
-              </a:rPr>
-              <a:t>20 milliards € d'actifs sous administration</a:t>
-            </a:r>
-            <a:endParaRPr lang="en-US" sz="1100" dirty="0"/>
-          </a:p>
-        </p:txBody>
-      </p:sp>
-      <p:sp>
-        <p:nvSpPr>
-          <p:cNvPr id="75" name="BM2">
-            <a:extLst>
-              <a:ext uri="{FF2B5EF4-FFF2-40B4-BE49-F238E27FC236}">
-                <a16:creationId xmlns:a16="http://schemas.microsoft.com/office/drawing/2014/main" id="{13B7F521-C4EF-5F61-B569-F7FEBB215476}"/>
-              </a:ext>
-            </a:extLst>
-          </p:cNvPr>
-          <p:cNvSpPr/>
-          <p:nvPr/>
-        </p:nvSpPr>
-        <p:spPr>
-          <a:xfrm>
-            <a:off x="502920" y="3720000"/>
-            <a:ext cx="22860" cy="340000"/>
-          </a:xfrm>
-          <a:prstGeom prst="rect">
-            <a:avLst/>
-          </a:prstGeom>
-          <a:solidFill>
-            <a:srgbClr val="1C2B3A"/>
-          </a:solidFill>
-          <a:ln w="12700">
-            <a:solidFill>
-              <a:srgbClr val="1C2B3A"/>
-            </a:solidFill>
-            <a:prstDash val="solid"/>
-          </a:ln>
-        </p:spPr>
-        <p:txBody>
-          <a:bodyPr/>
-          <a:lstStyle/>
-          <a:p>
-            <a:endParaRPr lang="fr-FR"/>
-          </a:p>
-        </p:txBody>
-      </p:sp>
-      <p:sp>
-        <p:nvSpPr>
-          <p:cNvPr id="77" name="BT2">
-            <a:extLst>
-              <a:ext uri="{FF2B5EF4-FFF2-40B4-BE49-F238E27FC236}">
-                <a16:creationId xmlns:a16="http://schemas.microsoft.com/office/drawing/2014/main" id="{B720BC1F-D5CE-6591-D05B-CB14701F124E}"/>
-              </a:ext>
-            </a:extLst>
-          </p:cNvPr>
-          <p:cNvSpPr/>
-          <p:nvPr/>
-        </p:nvSpPr>
-        <p:spPr>
-          <a:xfrm>
-            <a:off x="658368" y="3720000"/>
-            <a:ext cx="7453200" cy="340000"/>
-          </a:xfrm>
-          <a:prstGeom prst="rect">
-            <a:avLst/>
-          </a:prstGeom>
-          <a:noFill/>
-          <a:ln/>
-        </p:spPr>
-        <p:txBody>
-          <a:bodyPr wrap="square" lIns="0" tIns="0" rIns="0" bIns="0" rtlCol="0" anchor="t"/>
-          <a:lstStyle/>
-          <a:p>
-            <a:pPr marL="0" indent="0">
-              <a:buNone/>
-            </a:pPr>
-            <a:r>
-              <a:rPr lang="en-US" sz="1050" dirty="0">
-                <a:solidFill>
-                  <a:srgbClr val="4A5568"/>
-                </a:solidFill>
-                <a:latin typeface="Calibri" pitchFamily="34" charset="0"/>
-                <a:ea typeface="Calibri" pitchFamily="34" charset="-122"/>
-                <a:cs typeface="Calibri" pitchFamily="34" charset="-120"/>
-              </a:rPr>
-              <a:t>Actif sur plus de 10 marchés européens depuis 30 ans</a:t>
-            </a:r>
-            <a:endParaRPr lang="en-US" sz="1100" dirty="0"/>
-          </a:p>
-        </p:txBody>
-      </p:sp>
-      <p:sp>
-        <p:nvSpPr>
-          <p:cNvPr id="79" name="BM3">
-            <a:extLst>
-              <a:ext uri="{FF2B5EF4-FFF2-40B4-BE49-F238E27FC236}">
-                <a16:creationId xmlns:a16="http://schemas.microsoft.com/office/drawing/2014/main" id="{21751192-3FBC-C554-94A6-C07FFB2F48EF}"/>
-              </a:ext>
-            </a:extLst>
-          </p:cNvPr>
-          <p:cNvSpPr/>
-          <p:nvPr/>
-        </p:nvSpPr>
-        <p:spPr>
-          <a:xfrm>
-            <a:off x="502920" y="4110000"/>
-            <a:ext cx="22860" cy="340000"/>
-          </a:xfrm>
-          <a:prstGeom prst="rect">
-            <a:avLst/>
-          </a:prstGeom>
-          <a:solidFill>
-            <a:srgbClr val="1C2B3A"/>
-          </a:solidFill>
-          <a:ln w="12700">
-            <a:solidFill>
-              <a:srgbClr val="1C2B3A"/>
-            </a:solidFill>
-            <a:prstDash val="solid"/>
-          </a:ln>
-        </p:spPr>
-        <p:txBody>
-          <a:bodyPr/>
-          <a:lstStyle/>
-          <a:p>
-            <a:endParaRPr lang="fr-FR"/>
-          </a:p>
-        </p:txBody>
-      </p:sp>
-      <p:sp>
-        <p:nvSpPr>
-          <p:cNvPr id="81" name="BT3">
-            <a:extLst>
-              <a:ext uri="{FF2B5EF4-FFF2-40B4-BE49-F238E27FC236}">
-                <a16:creationId xmlns:a16="http://schemas.microsoft.com/office/drawing/2014/main" id="{48DC2F8F-9A87-BB38-31B6-2A9083B87E7F}"/>
-              </a:ext>
-            </a:extLst>
-          </p:cNvPr>
-          <p:cNvSpPr/>
-          <p:nvPr/>
-        </p:nvSpPr>
-        <p:spPr>
-          <a:xfrm>
-            <a:off x="658368" y="4110000"/>
-            <a:ext cx="7453200" cy="340000"/>
-          </a:xfrm>
-          <a:prstGeom prst="rect">
-            <a:avLst/>
-          </a:prstGeom>
-          <a:noFill/>
-          <a:ln/>
-        </p:spPr>
-        <p:txBody>
-          <a:bodyPr wrap="square" lIns="0" tIns="0" rIns="0" bIns="0" rtlCol="0" anchor="t"/>
-          <a:lstStyle/>
-          <a:p>
-            <a:pPr marL="0" indent="0">
-              <a:buNone/>
-            </a:pPr>
-            <a:r>
-              <a:rPr lang="en-US" sz="1050" dirty="0">
-                <a:solidFill>
-                  <a:srgbClr val="4A5568"/>
-                </a:solidFill>
-                <a:latin typeface="Calibri" pitchFamily="34" charset="0"/>
-                <a:ea typeface="Calibri" pitchFamily="34" charset="-122"/>
-                <a:cs typeface="Calibri" pitchFamily="34" charset="-120"/>
-              </a:rPr>
-              <a:t>Back-office francophone dédié, interlocuteur dédié Affilior</a:t>
-            </a:r>
-            <a:endParaRPr lang="en-US" sz="1100" dirty="0"/>
-          </a:p>
-        </p:txBody>
-      </p:sp>
-      <p:sp>
-        <p:nvSpPr>
-          <p:cNvPr id="83" name="BM4">
-            <a:extLst>
-              <a:ext uri="{FF2B5EF4-FFF2-40B4-BE49-F238E27FC236}">
-                <a16:creationId xmlns:a16="http://schemas.microsoft.com/office/drawing/2014/main" id="{B4FC362C-5111-8E06-FA99-6B1BDBF2E195}"/>
-              </a:ext>
-            </a:extLst>
-          </p:cNvPr>
-          <p:cNvSpPr/>
-          <p:nvPr/>
-        </p:nvSpPr>
-        <p:spPr>
-          <a:xfrm>
-            <a:off x="502920" y="4500000"/>
-            <a:ext cx="22860" cy="340000"/>
-          </a:xfrm>
-          <a:prstGeom prst="rect">
-            <a:avLst/>
-          </a:prstGeom>
-          <a:solidFill>
-            <a:srgbClr val="1C2B3A"/>
-          </a:solidFill>
-          <a:ln w="12700">
-            <a:solidFill>
-              <a:srgbClr val="1C2B3A"/>
-            </a:solidFill>
-            <a:prstDash val="solid"/>
-          </a:ln>
-        </p:spPr>
-        <p:txBody>
-          <a:bodyPr/>
-          <a:lstStyle/>
-          <a:p>
-            <a:endParaRPr lang="fr-FR"/>
-          </a:p>
-        </p:txBody>
-      </p:sp>
-      <p:sp>
-        <p:nvSpPr>
-          <p:cNvPr id="85" name="BT4">
-            <a:extLst>
-              <a:ext uri="{FF2B5EF4-FFF2-40B4-BE49-F238E27FC236}">
-                <a16:creationId xmlns:a16="http://schemas.microsoft.com/office/drawing/2014/main" id="{E48368D1-F153-0580-C9C1-54131D2FA94B}"/>
-              </a:ext>
-            </a:extLst>
-          </p:cNvPr>
-          <p:cNvSpPr/>
-          <p:nvPr/>
-        </p:nvSpPr>
-        <p:spPr>
-          <a:xfrm>
-            <a:off x="658368" y="4500000"/>
-            <a:ext cx="7453200" cy="340000"/>
-          </a:xfrm>
-          <a:prstGeom prst="rect">
-            <a:avLst/>
-          </a:prstGeom>
-          <a:noFill/>
-          <a:ln/>
-        </p:spPr>
-        <p:txBody>
-          <a:bodyPr wrap="square" lIns="0" tIns="0" rIns="0" bIns="0" rtlCol="0" anchor="t"/>
-          <a:lstStyle/>
-          <a:p>
-            <a:pPr marL="0" indent="0">
-              <a:buNone/>
-            </a:pPr>
-            <a:r>
-              <a:rPr lang="en-US" sz="1050" dirty="0">
-                <a:solidFill>
-                  <a:srgbClr val="4A5568"/>
-                </a:solidFill>
-                <a:latin typeface="Calibri" pitchFamily="34" charset="0"/>
-                <a:ea typeface="Calibri" pitchFamily="34" charset="-122"/>
-                <a:cs typeface="Calibri" pitchFamily="34" charset="-120"/>
-              </a:rPr>
-              <a:t>Large choix d'architecture ouverte en gestion</a:t>
-            </a:r>
-            <a:endParaRPr lang="en-US" sz="1100" dirty="0"/>
-          </a:p>
-        </p:txBody>
-      </p:sp>
-      <p:sp>
-        <p:nvSpPr>
-          <p:cNvPr id="87" name="Footer">
-            <a:extLst>
-              <a:ext uri="{FF2B5EF4-FFF2-40B4-BE49-F238E27FC236}">
-                <a16:creationId xmlns:a16="http://schemas.microsoft.com/office/drawing/2014/main" id="{D3E6CFC2-C8AA-5348-CE5A-A796D39714D9}"/>
-              </a:ext>
-            </a:extLst>
-          </p:cNvPr>
-          <p:cNvSpPr/>
-          <p:nvPr/>
-        </p:nvSpPr>
-        <p:spPr>
-          <a:xfrm>
-            <a:off x="2560320" y="5001768"/>
-            <a:ext cx="6080760" cy="118872"/>
-          </a:xfrm>
-          <a:prstGeom prst="rect">
-            <a:avLst/>
-          </a:prstGeom>
-          <a:noFill/>
-          <a:ln/>
-        </p:spPr>
-        <p:txBody>
-          <a:bodyPr wrap="square" lIns="0" tIns="0" rIns="0" bIns="0" rtlCol="0" anchor="ctr"/>
-          <a:lstStyle/>
-          <a:p>
-            <a:pPr marL="0" indent="0" algn="ctr">
-              <a:buNone/>
-            </a:pPr>
-            <a:r>
-              <a:rPr lang="en-US" sz="680" i="1" dirty="0">
-                <a:solidFill>
-                  <a:srgbClr val="A09080"/>
-                </a:solidFill>
-                <a:latin typeface="Calibri" pitchFamily="34" charset="0"/>
-                <a:ea typeface="Calibri" pitchFamily="34" charset="-122"/>
-                <a:cs typeface="Calibri" pitchFamily="34" charset="-120"/>
-              </a:rPr>
-              <a:t>Affilior Gestion Privée  ·  Confidentiel  ·  Août 2026  ·  Ce document ne constitue pas un conseil en investissement au sens MIF2</a:t>
-            </a:r>
-            <a:endParaRPr lang="en-US" sz="1100" dirty="0"/>
-          </a:p>
-        </p:txBody>
-      </p:sp>
-      <p:sp>
-        <p:nvSpPr>
-          <p:cNvPr id="89" name="PageNum">
-            <a:extLst>
-              <a:ext uri="{FF2B5EF4-FFF2-40B4-BE49-F238E27FC236}">
-                <a16:creationId xmlns:a16="http://schemas.microsoft.com/office/drawing/2014/main" id="{464A0250-CA00-F3B3-55D5-4D4958FCC45E}"/>
-              </a:ext>
-            </a:extLst>
-          </p:cNvPr>
-          <p:cNvSpPr/>
-          <p:nvPr/>
-        </p:nvSpPr>
-        <p:spPr>
-          <a:xfrm>
-            <a:off x="8100000" y="228600"/>
-            <a:ext cx="400000" cy="182880"/>
-          </a:xfrm>
-          <a:prstGeom prst="rect">
-            <a:avLst/>
-          </a:prstGeom>
-          <a:noFill/>
-          <a:ln/>
-        </p:spPr>
-        <p:txBody>
-          <a:bodyPr wrap="square" lIns="0" tIns="0" rIns="0" bIns="0" rtlCol="0" anchor="ctr"/>
-          <a:lstStyle/>
-          <a:p>
-            <a:pPr marL="0" indent="0" algn="r">
-              <a:buNone/>
-            </a:pPr>
-            <a:fld id="{10FAF57D-9689-440F-9950-4AB2FA11F867}" type="slidenum">
-              <a:rPr lang="en-US" sz="900" dirty="0">
-                <a:solidFill>
-                  <a:srgbClr val="A09080"/>
-                </a:solidFill>
-                <a:latin typeface="Garamond" pitchFamily="34" charset="0"/>
-              </a:rPr>
-              <a:t>7</a:t>
-            </a:fld>
-            <a:endParaRPr lang="en-US" sz="900" dirty="0"/>
-          </a:p>
-        </p:txBody>
-      </p:sp>
     </p:spTree>
     <p:extLst>
       <p:ext uri="{BB962C8B-B14F-4D97-AF65-F5344CB8AC3E}">
@@ -61982,7 +62114,7 @@
                 <a:ea typeface="Garamond" pitchFamily="34" charset="-122"/>
                 <a:cs typeface="Garamond" pitchFamily="34" charset="-120"/>
               </a:rPr>
-              <a:t>Lombard International — Pure player luxembourgeois</a:t>
+              <a:t>Lombard International</a:t>
             </a:r>
             <a:endParaRPr lang="en-US" sz="1100" dirty="0"/>
           </a:p>
@@ -63070,7 +63202,7 @@
                 <a:ea typeface="Garamond" pitchFamily="34" charset="-122"/>
                 <a:cs typeface="Garamond" pitchFamily="34" charset="-120"/>
               </a:rPr>
-              <a:t>ODDO BHF — Groupe familial indépendant</a:t>
+              <a:t>ODDO BHF</a:t>
             </a:r>
             <a:endParaRPr lang="en-US" sz="1100" dirty="0"/>
           </a:p>

--- a/Bibe_Def.pptx
+++ b/Bibe_Def.pptx
@@ -1401,7 +1401,7 @@
                 <a:ea typeface="Calibri" pitchFamily="34" charset="-122"/>
                 <a:cs typeface="Calibri" pitchFamily="34" charset="-120"/>
               </a:rPr>
-              <a:t>Affilior Gestion Privée  ·  Confidentiel  ·  Août 2026  ·  Ce document ne constitue pas un conseil en investissement au sens MIF2</a:t>
+              <a:t>Affilior Gestion Privée  ·  Confidentiel  ·  [MOIS ANNÉE]  ·  Ce document ne constitue pas un conseil en investissement au sens MIF2</a:t>
             </a:r>
             <a:endParaRPr lang="en-US" sz="1100" dirty="0"/>
           </a:p>
@@ -2706,7 +2706,7 @@
                 <a:ea typeface="Calibri" pitchFamily="34" charset="-122"/>
                 <a:cs typeface="Calibri" pitchFamily="34" charset="-120"/>
               </a:rPr>
-              <a:t>Affilior Gestion Privée  ·  Confidentiel  ·  Août 2026  ·  Ce document ne constitue pas un conseil en investissement au sens MIF2</a:t>
+              <a:t>Affilior Gestion Privée  ·  Confidentiel  ·  [MOIS ANNÉE]  ·  Ce document ne constitue pas un conseil en investissement au sens MIF2</a:t>
             </a:r>
             <a:endParaRPr lang="en-US" sz="1100" dirty="0"/>
           </a:p>
@@ -3756,7 +3756,7 @@
                 <a:ea typeface="Calibri" pitchFamily="34" charset="-122"/>
                 <a:cs typeface="Calibri" pitchFamily="34" charset="-120"/>
               </a:rPr>
-              <a:t>Affilior Gestion Privée  ·  Confidentiel  ·  Août 2026  ·  Ce document ne constitue pas un conseil en investissement au sens MIF2</a:t>
+              <a:t>Affilior Gestion Privée  ·  Confidentiel  ·  [MOIS ANNÉE]  ·  Ce document ne constitue pas un conseil en investissement au sens MIF2</a:t>
             </a:r>
             <a:endParaRPr lang="en-US" sz="1100" dirty="0"/>
           </a:p>
@@ -4773,7 +4773,7 @@
                 <a:ea typeface="Calibri" pitchFamily="34" charset="-122"/>
                 <a:cs typeface="Calibri" pitchFamily="34" charset="-120"/>
               </a:rPr>
-              <a:t>Affilior Gestion Privée  ·  Confidentiel  ·  Août 2026  ·  Ce document ne constitue pas un conseil en investissement au sens MIF2</a:t>
+              <a:t>Affilior Gestion Privée  ·  Confidentiel  ·  [MOIS ANNÉE]  ·  Ce document ne constitue pas un conseil en investissement au sens MIF2</a:t>
             </a:r>
             <a:endParaRPr lang="en-US" sz="1100" dirty="0"/>
           </a:p>
@@ -5836,7 +5836,7 @@
                 <a:ea typeface="Calibri" pitchFamily="34" charset="-122"/>
                 <a:cs typeface="Calibri" pitchFamily="34" charset="-120"/>
               </a:rPr>
-              <a:t>Affilior Gestion Privée  ·  Confidentiel  ·  Août 2026  ·  Ce document ne constitue pas un conseil en investissement au sens MIF2</a:t>
+              <a:t>Affilior Gestion Privée  ·  Confidentiel  ·  [MOIS ANNÉE]  ·  Ce document ne constitue pas un conseil en investissement au sens MIF2</a:t>
             </a:r>
             <a:endParaRPr lang="en-US" sz="1100" dirty="0"/>
           </a:p>
@@ -6853,7 +6853,7 @@
                 <a:ea typeface="Calibri" pitchFamily="34" charset="-122"/>
                 <a:cs typeface="Calibri" pitchFamily="34" charset="-120"/>
               </a:rPr>
-              <a:t>Affilior Gestion Privée  ·  Confidentiel  ·  Août 2026  ·  Ce document ne constitue pas un conseil en investissement au sens MIF2</a:t>
+              <a:t>Affilior Gestion Privée  ·  Confidentiel  ·  [MOIS ANNÉE]  ·  Ce document ne constitue pas un conseil en investissement au sens MIF2</a:t>
             </a:r>
             <a:endParaRPr lang="en-US" sz="1100" dirty="0"/>
           </a:p>
@@ -7881,7 +7881,7 @@
                 <a:ea typeface="Calibri" pitchFamily="34" charset="-122"/>
                 <a:cs typeface="Calibri" pitchFamily="34" charset="-120"/>
               </a:rPr>
-              <a:t>Affilior Gestion Privée  ·  Confidentiel  ·  Août 2026  ·  Ce document ne constitue pas un conseil en investissement au sens MIF2</a:t>
+              <a:t>Affilior Gestion Privée  ·  Confidentiel  ·  [MOIS ANNÉE]  ·  Ce document ne constitue pas un conseil en investissement au sens MIF2</a:t>
             </a:r>
             <a:endParaRPr lang="en-US" sz="1100" dirty="0"/>
           </a:p>
@@ -8898,7 +8898,7 @@
                 <a:ea typeface="Calibri" pitchFamily="34" charset="-122"/>
                 <a:cs typeface="Calibri" pitchFamily="34" charset="-120"/>
               </a:rPr>
-              <a:t>Affilior Gestion Privée  ·  Confidentiel  ·  Août 2026  ·  Ce document ne constitue pas un conseil en investissement au sens MIF2</a:t>
+              <a:t>Affilior Gestion Privée  ·  Confidentiel  ·  [MOIS ANNÉE]  ·  Ce document ne constitue pas un conseil en investissement au sens MIF2</a:t>
             </a:r>
             <a:endParaRPr lang="en-US" sz="1100" dirty="0"/>
           </a:p>
@@ -9915,7 +9915,7 @@
                 <a:ea typeface="Calibri" pitchFamily="34" charset="-122"/>
                 <a:cs typeface="Calibri" pitchFamily="34" charset="-120"/>
               </a:rPr>
-              <a:t>Affilior Gestion Privée  ·  Confidentiel  ·  Août 2026  ·  Ce document ne constitue pas un conseil en investissement au sens MIF2</a:t>
+              <a:t>Affilior Gestion Privée  ·  Confidentiel  ·  [MOIS ANNÉE]  ·  Ce document ne constitue pas un conseil en investissement au sens MIF2</a:t>
             </a:r>
             <a:endParaRPr lang="en-US" sz="1100" dirty="0"/>
           </a:p>
@@ -10932,7 +10932,7 @@
                 <a:ea typeface="Calibri" pitchFamily="34" charset="-122"/>
                 <a:cs typeface="Calibri" pitchFamily="34" charset="-120"/>
               </a:rPr>
-              <a:t>Affilior Gestion Privée  ·  Confidentiel  ·  Août 2026  ·  Ce document ne constitue pas un conseil en investissement au sens MIF2</a:t>
+              <a:t>Affilior Gestion Privée  ·  Confidentiel  ·  [MOIS ANNÉE]  ·  Ce document ne constitue pas un conseil en investissement au sens MIF2</a:t>
             </a:r>
             <a:endParaRPr lang="en-US" sz="1100" dirty="0"/>
           </a:p>
@@ -11949,7 +11949,7 @@
                 <a:ea typeface="Calibri" pitchFamily="34" charset="-122"/>
                 <a:cs typeface="Calibri" pitchFamily="34" charset="-120"/>
               </a:rPr>
-              <a:t>Affilior Gestion Privée  ·  Confidentiel  ·  Août 2026  ·  Ce document ne constitue pas un conseil en investissement au sens MIF2</a:t>
+              <a:t>Affilior Gestion Privée  ·  Confidentiel  ·  [MOIS ANNÉE]  ·  Ce document ne constitue pas un conseil en investissement au sens MIF2</a:t>
             </a:r>
             <a:endParaRPr lang="en-US" sz="1100" dirty="0"/>
           </a:p>
@@ -12967,7 +12967,7 @@
                 <a:ea typeface="Calibri" pitchFamily="34" charset="-122"/>
                 <a:cs typeface="Calibri" pitchFamily="34" charset="-120"/>
               </a:rPr>
-              <a:t>Affilior Gestion Privée  ·  Confidentiel  ·  Août 2026  ·  Ce document ne constitue pas un conseil en investissement au sens MIF2</a:t>
+              <a:t>Affilior Gestion Privée  ·  Confidentiel  ·  [MOIS ANNÉE]  ·  Ce document ne constitue pas un conseil en investissement au sens MIF2</a:t>
             </a:r>
             <a:endParaRPr lang="en-US" sz="1100" dirty="0"/>
           </a:p>
@@ -13984,7 +13984,7 @@
                 <a:ea typeface="Calibri" pitchFamily="34" charset="-122"/>
                 <a:cs typeface="Calibri" pitchFamily="34" charset="-120"/>
               </a:rPr>
-              <a:t>Affilior Gestion Privée  ·  Confidentiel  ·  Août 2026  ·  Ce document ne constitue pas un conseil en investissement au sens MIF2</a:t>
+              <a:t>Affilior Gestion Privée  ·  Confidentiel  ·  [MOIS ANNÉE]  ·  Ce document ne constitue pas un conseil en investissement au sens MIF2</a:t>
             </a:r>
             <a:endParaRPr lang="en-US" sz="1100" dirty="0"/>
           </a:p>
@@ -15116,7 +15116,7 @@
                 <a:ea typeface="Calibri" pitchFamily="34" charset="-122"/>
                 <a:cs typeface="Calibri" pitchFamily="34" charset="-120"/>
               </a:rPr>
-              <a:t>Affilior Gestion Privée  ·  Confidentiel  ·  Août 2026  ·  Ce document ne constitue pas un conseil en investissement au sens MIF2</a:t>
+              <a:t>Affilior Gestion Privée  ·  Confidentiel  ·  [MOIS ANNÉE]  ·  Ce document ne constitue pas un conseil en investissement au sens MIF2</a:t>
             </a:r>
             <a:endParaRPr lang="en-US" sz="1100" dirty="0"/>
           </a:p>
@@ -16133,7 +16133,7 @@
                 <a:ea typeface="Calibri" pitchFamily="34" charset="-122"/>
                 <a:cs typeface="Calibri" pitchFamily="34" charset="-120"/>
               </a:rPr>
-              <a:t>Affilior Gestion Privée  ·  Confidentiel  ·  Août 2026  ·  Ce document ne constitue pas un conseil en investissement au sens MIF2</a:t>
+              <a:t>Affilior Gestion Privée  ·  Confidentiel  ·  [MOIS ANNÉE]  ·  Ce document ne constitue pas un conseil en investissement au sens MIF2</a:t>
             </a:r>
             <a:endParaRPr lang="en-US" sz="1100" dirty="0"/>
           </a:p>
@@ -17150,7 +17150,7 @@
                 <a:ea typeface="Calibri" pitchFamily="34" charset="-122"/>
                 <a:cs typeface="Calibri" pitchFamily="34" charset="-120"/>
               </a:rPr>
-              <a:t>Affilior Gestion Privée  ·  Confidentiel  ·  Août 2026  ·  Ce document ne constitue pas un conseil en investissement au sens MIF2</a:t>
+              <a:t>Affilior Gestion Privée  ·  Confidentiel  ·  [MOIS ANNÉE]  ·  Ce document ne constitue pas un conseil en investissement au sens MIF2</a:t>
             </a:r>
             <a:endParaRPr lang="en-US" sz="1100" dirty="0"/>
           </a:p>
@@ -18167,7 +18167,7 @@
                 <a:ea typeface="Calibri" pitchFamily="34" charset="-122"/>
                 <a:cs typeface="Calibri" pitchFamily="34" charset="-120"/>
               </a:rPr>
-              <a:t>Affilior Gestion Privée  ·  Confidentiel  ·  Août 2026  ·  Ce document ne constitue pas un conseil en investissement au sens MIF2</a:t>
+              <a:t>Affilior Gestion Privée  ·  Confidentiel  ·  [MOIS ANNÉE]  ·  Ce document ne constitue pas un conseil en investissement au sens MIF2</a:t>
             </a:r>
             <a:endParaRPr lang="en-US" sz="1100" dirty="0"/>
           </a:p>
@@ -19114,7 +19114,7 @@
                 <a:ea typeface="Calibri" pitchFamily="34" charset="-122"/>
                 <a:cs typeface="Calibri" pitchFamily="34" charset="-120"/>
               </a:rPr>
-              <a:t>Affilior Gestion Privée  ·  Confidentiel  ·  Août 2026  ·  Ce document ne constitue pas un conseil en investissement au sens MIF2</a:t>
+              <a:t>Affilior Gestion Privée  ·  Confidentiel  ·  [MOIS ANNÉE]  ·  Ce document ne constitue pas un conseil en investissement au sens MIF2</a:t>
             </a:r>
             <a:endParaRPr lang="en-US" sz="1100" dirty="0"/>
           </a:p>
@@ -20235,7 +20235,7 @@
                 <a:ea typeface="Calibri" pitchFamily="34" charset="-122"/>
                 <a:cs typeface="Calibri" pitchFamily="34" charset="-120"/>
               </a:rPr>
-              <a:t>Affilior Gestion Privée  ·  Confidentiel  ·  Août 2026  ·  Ce document ne constitue pas un conseil en investissement au sens MIF2</a:t>
+              <a:t>Affilior Gestion Privée  ·  Confidentiel  ·  [MOIS ANNÉE]  ·  Ce document ne constitue pas un conseil en investissement au sens MIF2</a:t>
             </a:r>
             <a:endParaRPr lang="en-US" sz="1100" dirty="0"/>
           </a:p>
@@ -21422,7 +21422,7 @@
                 <a:ea typeface="Calibri" pitchFamily="34" charset="-122"/>
                 <a:cs typeface="Calibri" pitchFamily="34" charset="-120"/>
               </a:rPr>
-              <a:t>Affilior Gestion Privée  ·  Confidentiel  ·  Août 2026  ·  Ce document ne constitue pas un conseil en investissement au sens MIF2</a:t>
+              <a:t>Affilior Gestion Privée  ·  Confidentiel  ·  [MOIS ANNÉE]  ·  Ce document ne constitue pas un conseil en investissement au sens MIF2</a:t>
             </a:r>
             <a:endParaRPr lang="en-US" sz="1100" dirty="0"/>
           </a:p>
@@ -21833,7 +21833,7 @@
                 <a:ea typeface="Calibri" pitchFamily="34" charset="-122"/>
                 <a:cs typeface="Calibri" pitchFamily="34" charset="-120"/>
               </a:rPr>
-              <a:t>Affilior Gestion Privée  ·  Confidentiel  ·  Août 2026  ·  Ce document ne constitue pas un conseil en investissement au sens MIF2</a:t>
+              <a:t>Affilior Gestion Privée  ·  Confidentiel  ·  [MOIS ANNÉE]  ·  Ce document ne constitue pas un conseil en investissement au sens MIF2</a:t>
             </a:r>
             <a:endParaRPr lang="en-US" sz="1100" dirty="0"/>
           </a:p>
@@ -24157,7 +24157,7 @@
                 <a:ea typeface="Calibri" pitchFamily="34" charset="-122"/>
                 <a:cs typeface="Calibri" pitchFamily="34" charset="-120"/>
               </a:rPr>
-              <a:t>Affilior Gestion Privée  ·  Confidentiel  ·  Août 2026  ·  Ce document ne constitue pas un conseil en investissement au sens MIF2</a:t>
+              <a:t>Affilior Gestion Privée  ·  Confidentiel  ·  [MOIS ANNÉE]  ·  Ce document ne constitue pas un conseil en investissement au sens MIF2</a:t>
             </a:r>
             <a:endParaRPr lang="en-US" sz="1100" dirty="0"/>
           </a:p>
@@ -24568,7 +24568,7 @@
                 <a:ea typeface="Calibri" pitchFamily="34" charset="-122"/>
                 <a:cs typeface="Calibri" pitchFamily="34" charset="-120"/>
               </a:rPr>
-              <a:t>Affilior Gestion Privée  ·  Confidentiel  ·  Août 2026  ·  Ce document ne constitue pas un conseil en investissement au sens MIF2</a:t>
+              <a:t>Affilior Gestion Privée  ·  Confidentiel  ·  [MOIS ANNÉE]  ·  Ce document ne constitue pas un conseil en investissement au sens MIF2</a:t>
             </a:r>
             <a:endParaRPr lang="en-US" sz="1100" dirty="0"/>
           </a:p>
@@ -26750,7 +26750,7 @@
                 <a:ea typeface="Calibri" pitchFamily="34" charset="-122"/>
                 <a:cs typeface="Calibri" pitchFamily="34" charset="-120"/>
               </a:rPr>
-              <a:t>Affilior Gestion Privée  ·  Confidentiel  ·  Août 2026  ·  Ce document ne constitue pas un conseil en investissement au sens MIF2</a:t>
+              <a:t>Affilior Gestion Privée  ·  Confidentiel  ·  [MOIS ANNÉE]  ·  Ce document ne constitue pas un conseil en investissement au sens MIF2</a:t>
             </a:r>
             <a:endParaRPr lang="en-US" sz="1100" dirty="0"/>
           </a:p>
@@ -27161,7 +27161,7 @@
                 <a:ea typeface="Calibri" pitchFamily="34" charset="-122"/>
                 <a:cs typeface="Calibri" pitchFamily="34" charset="-120"/>
               </a:rPr>
-              <a:t>Affilior Gestion Privée  ·  Confidentiel  ·  Août 2026  ·  Ce document ne constitue pas un conseil en investissement au sens MIF2</a:t>
+              <a:t>Affilior Gestion Privée  ·  Confidentiel  ·  [MOIS ANNÉE]  ·  Ce document ne constitue pas un conseil en investissement au sens MIF2</a:t>
             </a:r>
             <a:endParaRPr lang="en-US" sz="1100" dirty="0"/>
           </a:p>
@@ -28168,7 +28168,7 @@
                 <a:ea typeface="Calibri" pitchFamily="34" charset="-122"/>
                 <a:cs typeface="Calibri" pitchFamily="34" charset="-120"/>
               </a:rPr>
-              <a:t>Affilior Gestion Privée  ·  Confidentiel  ·  Août 2026  ·  Ce document ne constitue pas un conseil en investissement au sens MIF2</a:t>
+              <a:t>Affilior Gestion Privée  ·  Confidentiel  ·  [MOIS ANNÉE]  ·  Ce document ne constitue pas un conseil en investissement au sens MIF2</a:t>
             </a:r>
             <a:endParaRPr lang="en-US" sz="1100" dirty="0"/>
           </a:p>
@@ -29882,7 +29882,7 @@
                 <a:ea typeface="Calibri" pitchFamily="34" charset="-122"/>
                 <a:cs typeface="Calibri" pitchFamily="34" charset="-120"/>
               </a:rPr>
-              <a:t>Affilior Gestion Privée  ·  Confidentiel  ·  Août 2026  ·  Ce document ne constitue pas un conseil en investissement au sens MIF2</a:t>
+              <a:t>Affilior Gestion Privée  ·  Confidentiel  ·  [MOIS ANNÉE]  ·  Ce document ne constitue pas un conseil en investissement au sens MIF2</a:t>
             </a:r>
             <a:endParaRPr lang="en-US" sz="1100" dirty="0"/>
           </a:p>
@@ -31248,7 +31248,7 @@
                 <a:ea typeface="Calibri" pitchFamily="34" charset="-122"/>
                 <a:cs typeface="Calibri" pitchFamily="34" charset="-120"/>
               </a:rPr>
-              <a:t>Affilior Gestion Privée  ·  Confidentiel  ·  Août 2026  ·  Ce document ne constitue pas un conseil en investissement au sens MIF2</a:t>
+              <a:t>Affilior Gestion Privée  ·  Confidentiel  ·  [MOIS ANNÉE]  ·  Ce document ne constitue pas un conseil en investissement au sens MIF2</a:t>
             </a:r>
             <a:endParaRPr lang="en-US" sz="1100" dirty="0"/>
           </a:p>
@@ -31981,7 +31981,7 @@
                 <a:ea typeface="Calibri" pitchFamily="34" charset="-122"/>
                 <a:cs typeface="Calibri" pitchFamily="34" charset="-120"/>
               </a:rPr>
-              <a:t>Affilior Gestion Privée  ·  Confidentiel  ·  Août 2026  ·  Ce document ne constitue pas un conseil en investissement au sens MIF2</a:t>
+              <a:t>Affilior Gestion Privée  ·  Confidentiel  ·  [MOIS ANNÉE]  ·  Ce document ne constitue pas un conseil en investissement au sens MIF2</a:t>
             </a:r>
             <a:endParaRPr lang="en-US" sz="1100" dirty="0"/>
           </a:p>
@@ -33586,7 +33586,7 @@
                 <a:ea typeface="Calibri" pitchFamily="34" charset="-122"/>
                 <a:cs typeface="Calibri" pitchFamily="34" charset="-120"/>
               </a:rPr>
-              <a:t>Affilior Gestion Privée  ·  Confidentiel  ·  Août 2026  ·  Ce document ne constitue pas un conseil en investissement au sens MIF2</a:t>
+              <a:t>Affilior Gestion Privée  ·  Confidentiel  ·  [MOIS ANNÉE]  ·  Ce document ne constitue pas un conseil en investissement au sens MIF2</a:t>
             </a:r>
             <a:endParaRPr lang="en-US" sz="1100" dirty="0"/>
           </a:p>
@@ -34791,7 +34791,7 @@
                 <a:ea typeface="Calibri" pitchFamily="34" charset="-122"/>
                 <a:cs typeface="Calibri" pitchFamily="34" charset="-120"/>
               </a:rPr>
-              <a:t>Affilior Gestion Privée  ·  Confidentiel  ·  Août 2026  ·  Ce document ne constitue pas un conseil en investissement au sens MIF2</a:t>
+              <a:t>Affilior Gestion Privée  ·  Confidentiel  ·  [MOIS ANNÉE]  ·  Ce document ne constitue pas un conseil en investissement au sens MIF2</a:t>
             </a:r>
             <a:endParaRPr lang="en-US" sz="1100" dirty="0"/>
           </a:p>
@@ -36065,7 +36065,7 @@
                 <a:ea typeface="Calibri" pitchFamily="34" charset="-122"/>
                 <a:cs typeface="Calibri" pitchFamily="34" charset="-120"/>
               </a:rPr>
-              <a:t>Affilior Gestion Privée  ·  Confidentiel  ·  Août 2026  ·  Ce document ne constitue pas un conseil en investissement au sens MIF2</a:t>
+              <a:t>Affilior Gestion Privée  ·  Confidentiel  ·  [MOIS ANNÉE]  ·  Ce document ne constitue pas un conseil en investissement au sens MIF2</a:t>
             </a:r>
             <a:endParaRPr lang="en-US" sz="1100" dirty="0"/>
           </a:p>
@@ -37817,7 +37817,7 @@
                 <a:ea typeface="Calibri" pitchFamily="34" charset="-122"/>
                 <a:cs typeface="Calibri" pitchFamily="34" charset="-120"/>
               </a:rPr>
-              <a:t>Affilior Gestion Privée  ·  Confidentiel  ·  Août 2026  ·  Ce document ne constitue pas un conseil en investissement au sens MIF2</a:t>
+              <a:t>Affilior Gestion Privée  ·  Confidentiel  ·  [MOIS ANNÉE]  ·  Ce document ne constitue pas un conseil en investissement au sens MIF2</a:t>
             </a:r>
             <a:endParaRPr lang="en-US" sz="1100" dirty="0"/>
           </a:p>
@@ -38999,7 +38999,7 @@
                 <a:ea typeface="Calibri" pitchFamily="34" charset="-122"/>
                 <a:cs typeface="Calibri" pitchFamily="34" charset="-120"/>
               </a:rPr>
-              <a:t>Affilior Gestion Privée  ·  Confidentiel  ·  Août 2026  ·  Ce document ne constitue pas un conseil en investissement au sens MIF2</a:t>
+              <a:t>Affilior Gestion Privée  ·  Confidentiel  ·  [MOIS ANNÉE]  ·  Ce document ne constitue pas un conseil en investissement au sens MIF2</a:t>
             </a:r>
             <a:endParaRPr lang="en-US" sz="1100" dirty="0"/>
           </a:p>
@@ -39928,7 +39928,7 @@
                 <a:ea typeface="Calibri" pitchFamily="34" charset="-122"/>
                 <a:cs typeface="Calibri" pitchFamily="34" charset="-120"/>
               </a:rPr>
-              <a:t>Affilior Gestion Privée  ·  Confidentiel  ·  Août 2026  ·  Ce document ne constitue pas un conseil en investissement au sens MIF2</a:t>
+              <a:t>Affilior Gestion Privée  ·  Confidentiel  ·  [MOIS ANNÉE]  ·  Ce document ne constitue pas un conseil en investissement au sens MIF2</a:t>
             </a:r>
             <a:endParaRPr lang="en-US" sz="1100" dirty="0"/>
           </a:p>
@@ -41124,7 +41124,7 @@
                 <a:ea typeface="Calibri" pitchFamily="34" charset="-122"/>
                 <a:cs typeface="Calibri" pitchFamily="34" charset="-120"/>
               </a:rPr>
-              <a:t>Affilior Gestion Privée  ·  Confidentiel  ·  Août 2026  ·  Ce document ne constitue pas un conseil en investissement au sens MIF2</a:t>
+              <a:t>Affilior Gestion Privée  ·  Confidentiel  ·  [MOIS ANNÉE]  ·  Ce document ne constitue pas un conseil en investissement au sens MIF2</a:t>
             </a:r>
             <a:endParaRPr lang="en-US" sz="1100" dirty="0"/>
           </a:p>
@@ -42720,7 +42720,7 @@
                 <a:ea typeface="Calibri" pitchFamily="34" charset="-122"/>
                 <a:cs typeface="Calibri" pitchFamily="34" charset="-120"/>
               </a:rPr>
-              <a:t>Affilior Gestion Privée  ·  Confidentiel  ·  Août 2026  ·  Ce document ne constitue pas un conseil en investissement au sens MIF2</a:t>
+              <a:t>Affilior Gestion Privée  ·  Confidentiel  ·  [MOIS ANNÉE]  ·  Ce document ne constitue pas un conseil en investissement au sens MIF2</a:t>
             </a:r>
             <a:endParaRPr lang="en-US" sz="1100" dirty="0"/>
           </a:p>
@@ -44325,7 +44325,7 @@
                 <a:ea typeface="Calibri" pitchFamily="34" charset="-122"/>
                 <a:cs typeface="Calibri" pitchFamily="34" charset="-120"/>
               </a:rPr>
-              <a:t>Affilior Gestion Privée  ·  Confidentiel  ·  Août 2026  ·  Ce document ne constitue pas un conseil en investissement au sens MIF2</a:t>
+              <a:t>Affilior Gestion Privée  ·  Confidentiel  ·  [MOIS ANNÉE]  ·  Ce document ne constitue pas un conseil en investissement au sens MIF2</a:t>
             </a:r>
             <a:endParaRPr lang="en-US" sz="1100" dirty="0"/>
           </a:p>
@@ -46286,7 +46286,7 @@
                 <a:ea typeface="Calibri" pitchFamily="34" charset="-122"/>
                 <a:cs typeface="Calibri" pitchFamily="34" charset="-120"/>
               </a:rPr>
-              <a:t>Affilior Gestion Privée  ·  Confidentiel  ·  Août 2026  ·  Ce document ne constitue pas un conseil en investissement au sens MIF2</a:t>
+              <a:t>Affilior Gestion Privée  ·  Confidentiel  ·  [MOIS ANNÉE]  ·  Ce document ne constitue pas un conseil en investissement au sens MIF2</a:t>
             </a:r>
             <a:endParaRPr lang="en-US" sz="1100" dirty="0"/>
           </a:p>
@@ -46697,7 +46697,7 @@
                 <a:ea typeface="Calibri" pitchFamily="34" charset="-122"/>
                 <a:cs typeface="Calibri" pitchFamily="34" charset="-120"/>
               </a:rPr>
-              <a:t>Affilior Gestion Privée  ·  Confidentiel  ·  Août 2026  ·  Ce document ne constitue pas un conseil en investissement au sens MIF2</a:t>
+              <a:t>Affilior Gestion Privée  ·  Confidentiel  ·  [MOIS ANNÉE]  ·  Ce document ne constitue pas un conseil en investissement au sens MIF2</a:t>
             </a:r>
             <a:endParaRPr lang="en-US" sz="1100" dirty="0"/>
           </a:p>
@@ -47649,7 +47649,7 @@
                 <a:ea typeface="Calibri" pitchFamily="34" charset="-122"/>
                 <a:cs typeface="Calibri" pitchFamily="34" charset="-120"/>
               </a:rPr>
-              <a:t>Affilior Gestion Privée  ·  Confidentiel  ·  Août 2026  ·  Ce document ne constitue pas un conseil en investissement au sens MIF2</a:t>
+              <a:t>Affilior Gestion Privée  ·  Confidentiel  ·  [MOIS ANNÉE]  ·  Ce document ne constitue pas un conseil en investissement au sens MIF2</a:t>
             </a:r>
             <a:endParaRPr lang="en-US" sz="1100" dirty="0"/>
           </a:p>
@@ -48656,7 +48656,7 @@
                 <a:ea typeface="Calibri" pitchFamily="34" charset="-122"/>
                 <a:cs typeface="Calibri" pitchFamily="34" charset="-120"/>
               </a:rPr>
-              <a:t>Affilior Gestion Privée  ·  Confidentiel  ·  Août 2026  ·  Ce document ne constitue pas un conseil en investissement au sens MIF2</a:t>
+              <a:t>Affilior Gestion Privée  ·  Confidentiel  ·  [MOIS ANNÉE]  ·  Ce document ne constitue pas un conseil en investissement au sens MIF2</a:t>
             </a:r>
             <a:endParaRPr lang="en-US" sz="1100" dirty="0"/>
           </a:p>
@@ -50436,7 +50436,7 @@
                 <a:ea typeface="Calibri" pitchFamily="34" charset="-122"/>
                 <a:cs typeface="Calibri" pitchFamily="34" charset="-120"/>
               </a:rPr>
-              <a:t>Affilior Gestion Privée  ·  Confidentiel  ·  Août 2026  ·  Ce document ne constitue pas un conseil en investissement au sens MIF2</a:t>
+              <a:t>Affilior Gestion Privée  ·  Confidentiel  ·  [MOIS ANNÉE]  ·  Ce document ne constitue pas un conseil en investissement au sens MIF2</a:t>
             </a:r>
             <a:endParaRPr lang="en-US" sz="1100" dirty="0"/>
           </a:p>
@@ -52732,7 +52732,7 @@
                 <a:ea typeface="Calibri" pitchFamily="34" charset="-122"/>
                 <a:cs typeface="Calibri" pitchFamily="34" charset="-120"/>
               </a:rPr>
-              <a:t>Affilior Gestion Privée  ·  Confidentiel  ·  Août 2026  ·  Ce document ne constitue pas un conseil en investissement au sens MIF2</a:t>
+              <a:t>Affilior Gestion Privée  ·  Confidentiel  ·  [MOIS ANNÉE]  ·  Ce document ne constitue pas un conseil en investissement au sens MIF2</a:t>
             </a:r>
             <a:endParaRPr lang="en-US" sz="1100" dirty="0"/>
           </a:p>
@@ -54421,7 +54421,7 @@
                 <a:ea typeface="Calibri" pitchFamily="34" charset="-122"/>
                 <a:cs typeface="Calibri" pitchFamily="34" charset="-120"/>
               </a:rPr>
-              <a:t>Affilior Gestion Privée  ·  Confidentiel  ·  Août 2026  ·  Ce document ne constitue pas un conseil en investissement au sens MIF2</a:t>
+              <a:t>Affilior Gestion Privée  ·  Confidentiel  ·  [MOIS ANNÉE]  ·  Ce document ne constitue pas un conseil en investissement au sens MIF2</a:t>
             </a:r>
             <a:endParaRPr lang="en-US" sz="1100" dirty="0"/>
           </a:p>
@@ -56280,7 +56280,7 @@
                 <a:ea typeface="Calibri" pitchFamily="34" charset="-122"/>
                 <a:cs typeface="Calibri" pitchFamily="34" charset="-120"/>
               </a:rPr>
-              <a:t>Affilior Gestion Privée  ·  Confidentiel  ·  Août 2026  ·  Ce document ne constitue pas un conseil en investissement au sens MIF2</a:t>
+              <a:t>Affilior Gestion Privée  ·  Confidentiel  ·  [MOIS ANNÉE]  ·  Ce document ne constitue pas un conseil en investissement au sens MIF2</a:t>
             </a:r>
             <a:endParaRPr lang="en-US" sz="1100" dirty="0"/>
           </a:p>
@@ -57855,7 +57855,7 @@
                 <a:ea typeface="Calibri" pitchFamily="34" charset="-122"/>
                 <a:cs typeface="Calibri" pitchFamily="34" charset="-120"/>
               </a:rPr>
-              <a:t>Affilior Gestion Privée  ·  Confidentiel  ·  Août 2026  ·  Ce document ne constitue pas un conseil en investissement au sens MIF2</a:t>
+              <a:t>Affilior Gestion Privée  ·  Confidentiel  ·  [MOIS ANNÉE]  ·  Ce document ne constitue pas un conseil en investissement au sens MIF2</a:t>
             </a:r>
             <a:endParaRPr lang="en-US" sz="1100" dirty="0"/>
           </a:p>
@@ -59430,7 +59430,7 @@
                 <a:ea typeface="Calibri" pitchFamily="34" charset="-122"/>
                 <a:cs typeface="Calibri" pitchFamily="34" charset="-120"/>
               </a:rPr>
-              <a:t>Affilior Gestion Privée  ·  Confidentiel  ·  Août 2026  ·  Ce document ne constitue pas un conseil en investissement au sens MIF2</a:t>
+              <a:t>Affilior Gestion Privée  ·  Confidentiel  ·  [MOIS ANNÉE]  ·  Ce document ne constitue pas un conseil en investissement au sens MIF2</a:t>
             </a:r>
             <a:endParaRPr lang="en-US" sz="1100" dirty="0"/>
           </a:p>
@@ -60479,7 +60479,7 @@
                 <a:ea typeface="Calibri" pitchFamily="34" charset="-122"/>
                 <a:cs typeface="Calibri" pitchFamily="34" charset="-120"/>
               </a:rPr>
-              <a:t>Affilior Gestion Privée  ·  Confidentiel  ·  Août 2026  ·  Ce document ne constitue pas un conseil en investissement au sens MIF2</a:t>
+              <a:t>Affilior Gestion Privée  ·  Confidentiel  ·  [MOIS ANNÉE]  ·  Ce document ne constitue pas un conseil en investissement au sens MIF2</a:t>
             </a:r>
             <a:endParaRPr lang="en-US" sz="1100" dirty="0"/>
           </a:p>
@@ -61733,7 +61733,7 @@
                 <a:ea typeface="Calibri" pitchFamily="34" charset="-122"/>
                 <a:cs typeface="Calibri" pitchFamily="34" charset="-120"/>
               </a:rPr>
-              <a:t>Affilior Gestion Privée  ·  Confidentiel  ·  Août 2026  ·  Ce document ne constitue pas un conseil en investissement au sens MIF2</a:t>
+              <a:t>Affilior Gestion Privée  ·  Confidentiel  ·  [MOIS ANNÉE]  ·  Ce document ne constitue pas un conseil en investissement au sens MIF2</a:t>
             </a:r>
             <a:endParaRPr lang="en-US" sz="1100" dirty="0"/>
           </a:p>
@@ -62862,7 +62862,7 @@
                 <a:ea typeface="Calibri" pitchFamily="34" charset="-122"/>
                 <a:cs typeface="Calibri" pitchFamily="34" charset="-120"/>
               </a:rPr>
-              <a:t>Affilior Gestion Privée  ·  Confidentiel  ·  Août 2026  ·  Ce document ne constitue pas un conseil en investissement au sens MIF2</a:t>
+              <a:t>Affilior Gestion Privée  ·  Confidentiel  ·  [MOIS ANNÉE]  ·  Ce document ne constitue pas un conseil en investissement au sens MIF2</a:t>
             </a:r>
             <a:endParaRPr lang="en-US" sz="1100" dirty="0"/>
           </a:p>
@@ -63879,7 +63879,7 @@
                 <a:ea typeface="Calibri" pitchFamily="34" charset="-122"/>
                 <a:cs typeface="Calibri" pitchFamily="34" charset="-120"/>
               </a:rPr>
-              <a:t>Affilior Gestion Privée  ·  Confidentiel  ·  Août 2026  ·  Ce document ne constitue pas un conseil en investissement au sens MIF2</a:t>
+              <a:t>Affilior Gestion Privée  ·  Confidentiel  ·  [MOIS ANNÉE]  ·  Ce document ne constitue pas un conseil en investissement au sens MIF2</a:t>
             </a:r>
             <a:endParaRPr lang="en-US" sz="1100" dirty="0"/>
           </a:p>

--- a/Bibe_Def.pptx
+++ b/Bibe_Def.pptx
@@ -1695,43 +1695,6 @@
           </a:p>
         </p:txBody>
       </p:sp>
-      <p:sp>
-        <p:nvSpPr>
-          <p:cNvPr id="4000" name="PageNum"/>
-          <p:cNvSpPr/>
-          <p:nvPr/>
-        </p:nvSpPr>
-        <p:spPr>
-          <a:xfrm>
-            <a:off x="8100000" y="228600"/>
-            <a:ext cx="400000" cy="182880"/>
-          </a:xfrm>
-          <a:prstGeom prst="rect">
-            <a:avLst/>
-          </a:prstGeom>
-          <a:noFill/>
-          <a:ln/>
-        </p:spPr>
-        <p:txBody>
-          <a:bodyPr wrap="square" lIns="0" tIns="0" rIns="0" bIns="0" rtlCol="0" anchor="ctr"/>
-          <a:lstStyle/>
-          <a:p>
-            <a:pPr marL="0" indent="0" algn="r">
-              <a:buNone/>
-            </a:pPr>
-            <a:fld id="{67628007-78B2-480A-B2D7-92AE4D8F2CAC}" type="slidenum">
-              <a:rPr lang="en-US" sz="900" dirty="0">
-                <a:solidFill>
-                  <a:srgbClr val="A09080"/>
-                </a:solidFill>
-                <a:latin typeface="Garamond" pitchFamily="34" charset="0"/>
-              </a:rPr>
-              <a:t>1</a:t>
-            </a:fld>
-            <a:endParaRPr lang="en-US" sz="900" dirty="0"/>
-          </a:p>
-        </p:txBody>
-      </p:sp>
     </p:spTree>
   </p:cSld>
   <p:clrMapOvr>
@@ -2712,43 +2675,6 @@
           </a:p>
         </p:txBody>
       </p:sp>
-      <p:sp>
-        <p:nvSpPr>
-          <p:cNvPr id="4000" name="PageNum"/>
-          <p:cNvSpPr/>
-          <p:nvPr/>
-        </p:nvSpPr>
-        <p:spPr>
-          <a:xfrm>
-            <a:off x="8100000" y="228600"/>
-            <a:ext cx="400000" cy="182880"/>
-          </a:xfrm>
-          <a:prstGeom prst="rect">
-            <a:avLst/>
-          </a:prstGeom>
-          <a:noFill/>
-          <a:ln/>
-        </p:spPr>
-        <p:txBody>
-          <a:bodyPr wrap="square" lIns="0" tIns="0" rIns="0" bIns="0" rtlCol="0" anchor="ctr"/>
-          <a:lstStyle/>
-          <a:p>
-            <a:pPr marL="0" indent="0" algn="r">
-              <a:buNone/>
-            </a:pPr>
-            <a:fld id="{72FA831D-1E01-458D-B801-5BCC8FD7CEDD}" type="slidenum">
-              <a:rPr lang="en-US" sz="900" dirty="0">
-                <a:solidFill>
-                  <a:srgbClr val="A09080"/>
-                </a:solidFill>
-                <a:latin typeface="Garamond" pitchFamily="34" charset="0"/>
-              </a:rPr>
-              <a:t>10</a:t>
-            </a:fld>
-            <a:endParaRPr lang="en-US" sz="900" dirty="0"/>
-          </a:p>
-        </p:txBody>
-      </p:sp>
     </p:spTree>
   </p:cSld>
   <p:clrMapOvr>
@@ -3762,43 +3688,6 @@
           </a:p>
         </p:txBody>
       </p:sp>
-      <p:sp>
-        <p:nvSpPr>
-          <p:cNvPr id="4000" name="PageNum"/>
-          <p:cNvSpPr/>
-          <p:nvPr/>
-        </p:nvSpPr>
-        <p:spPr>
-          <a:xfrm>
-            <a:off x="8100000" y="228600"/>
-            <a:ext cx="400000" cy="182880"/>
-          </a:xfrm>
-          <a:prstGeom prst="rect">
-            <a:avLst/>
-          </a:prstGeom>
-          <a:noFill/>
-          <a:ln/>
-        </p:spPr>
-        <p:txBody>
-          <a:bodyPr wrap="square" lIns="0" tIns="0" rIns="0" bIns="0" rtlCol="0" anchor="ctr"/>
-          <a:lstStyle/>
-          <a:p>
-            <a:pPr marL="0" indent="0" algn="r">
-              <a:buNone/>
-            </a:pPr>
-            <a:fld id="{8AFB4BD4-3D16-457E-B579-76F32152A923}" type="slidenum">
-              <a:rPr lang="en-US" sz="900" dirty="0">
-                <a:solidFill>
-                  <a:srgbClr val="A09080"/>
-                </a:solidFill>
-                <a:latin typeface="Garamond" pitchFamily="34" charset="0"/>
-              </a:rPr>
-              <a:t>11</a:t>
-            </a:fld>
-            <a:endParaRPr lang="en-US" sz="900" dirty="0"/>
-          </a:p>
-        </p:txBody>
-      </p:sp>
     </p:spTree>
   </p:cSld>
   <p:clrMapOvr>
@@ -4779,43 +4668,6 @@
           </a:p>
         </p:txBody>
       </p:sp>
-      <p:sp>
-        <p:nvSpPr>
-          <p:cNvPr id="4000" name="PageNum"/>
-          <p:cNvSpPr/>
-          <p:nvPr/>
-        </p:nvSpPr>
-        <p:spPr>
-          <a:xfrm>
-            <a:off x="8100000" y="228600"/>
-            <a:ext cx="400000" cy="182880"/>
-          </a:xfrm>
-          <a:prstGeom prst="rect">
-            <a:avLst/>
-          </a:prstGeom>
-          <a:noFill/>
-          <a:ln/>
-        </p:spPr>
-        <p:txBody>
-          <a:bodyPr wrap="square" lIns="0" tIns="0" rIns="0" bIns="0" rtlCol="0" anchor="ctr"/>
-          <a:lstStyle/>
-          <a:p>
-            <a:pPr marL="0" indent="0" algn="r">
-              <a:buNone/>
-            </a:pPr>
-            <a:fld id="{D0221A35-947A-48A0-9FDC-18CC94AF3A0A}" type="slidenum">
-              <a:rPr lang="en-US" sz="900" dirty="0">
-                <a:solidFill>
-                  <a:srgbClr val="A09080"/>
-                </a:solidFill>
-                <a:latin typeface="Garamond" pitchFamily="34" charset="0"/>
-              </a:rPr>
-              <a:t>12</a:t>
-            </a:fld>
-            <a:endParaRPr lang="en-US" sz="900" dirty="0"/>
-          </a:p>
-        </p:txBody>
-      </p:sp>
     </p:spTree>
   </p:cSld>
   <p:clrMapOvr>
@@ -5842,43 +5694,6 @@
           </a:p>
         </p:txBody>
       </p:sp>
-      <p:sp>
-        <p:nvSpPr>
-          <p:cNvPr id="4000" name="PageNum"/>
-          <p:cNvSpPr/>
-          <p:nvPr/>
-        </p:nvSpPr>
-        <p:spPr>
-          <a:xfrm>
-            <a:off x="8100000" y="228600"/>
-            <a:ext cx="400000" cy="182880"/>
-          </a:xfrm>
-          <a:prstGeom prst="rect">
-            <a:avLst/>
-          </a:prstGeom>
-          <a:noFill/>
-          <a:ln/>
-        </p:spPr>
-        <p:txBody>
-          <a:bodyPr wrap="square" lIns="0" tIns="0" rIns="0" bIns="0" rtlCol="0" anchor="ctr"/>
-          <a:lstStyle/>
-          <a:p>
-            <a:pPr marL="0" indent="0" algn="r">
-              <a:buNone/>
-            </a:pPr>
-            <a:fld id="{000C70EC-D0D9-419E-ADB3-AD59917C83C5}" type="slidenum">
-              <a:rPr lang="en-US" sz="900" dirty="0">
-                <a:solidFill>
-                  <a:srgbClr val="A09080"/>
-                </a:solidFill>
-                <a:latin typeface="Garamond" pitchFamily="34" charset="0"/>
-              </a:rPr>
-              <a:t>13</a:t>
-            </a:fld>
-            <a:endParaRPr lang="en-US" sz="900" dirty="0"/>
-          </a:p>
-        </p:txBody>
-      </p:sp>
     </p:spTree>
   </p:cSld>
   <p:clrMapOvr>
@@ -6859,43 +6674,6 @@
           </a:p>
         </p:txBody>
       </p:sp>
-      <p:sp>
-        <p:nvSpPr>
-          <p:cNvPr id="4000" name="PageNum"/>
-          <p:cNvSpPr/>
-          <p:nvPr/>
-        </p:nvSpPr>
-        <p:spPr>
-          <a:xfrm>
-            <a:off x="8100000" y="228600"/>
-            <a:ext cx="400000" cy="182880"/>
-          </a:xfrm>
-          <a:prstGeom prst="rect">
-            <a:avLst/>
-          </a:prstGeom>
-          <a:noFill/>
-          <a:ln/>
-        </p:spPr>
-        <p:txBody>
-          <a:bodyPr wrap="square" lIns="0" tIns="0" rIns="0" bIns="0" rtlCol="0" anchor="ctr"/>
-          <a:lstStyle/>
-          <a:p>
-            <a:pPr marL="0" indent="0" algn="r">
-              <a:buNone/>
-            </a:pPr>
-            <a:fld id="{B54512A9-EF00-446D-8518-4AE84288C259}" type="slidenum">
-              <a:rPr lang="en-US" sz="900" dirty="0">
-                <a:solidFill>
-                  <a:srgbClr val="A09080"/>
-                </a:solidFill>
-                <a:latin typeface="Garamond" pitchFamily="34" charset="0"/>
-              </a:rPr>
-              <a:t>14</a:t>
-            </a:fld>
-            <a:endParaRPr lang="en-US" sz="900" dirty="0"/>
-          </a:p>
-        </p:txBody>
-      </p:sp>
     </p:spTree>
   </p:cSld>
   <p:clrMapOvr>
@@ -7887,43 +7665,6 @@
           </a:p>
         </p:txBody>
       </p:sp>
-      <p:sp>
-        <p:nvSpPr>
-          <p:cNvPr id="4000" name="PageNum"/>
-          <p:cNvSpPr/>
-          <p:nvPr/>
-        </p:nvSpPr>
-        <p:spPr>
-          <a:xfrm>
-            <a:off x="8100000" y="228600"/>
-            <a:ext cx="400000" cy="182880"/>
-          </a:xfrm>
-          <a:prstGeom prst="rect">
-            <a:avLst/>
-          </a:prstGeom>
-          <a:noFill/>
-          <a:ln/>
-        </p:spPr>
-        <p:txBody>
-          <a:bodyPr wrap="square" lIns="0" tIns="0" rIns="0" bIns="0" rtlCol="0" anchor="ctr"/>
-          <a:lstStyle/>
-          <a:p>
-            <a:pPr marL="0" indent="0" algn="r">
-              <a:buNone/>
-            </a:pPr>
-            <a:fld id="{22CF8149-6AD2-44D6-942B-07659985AB8F}" type="slidenum">
-              <a:rPr lang="en-US" sz="900" dirty="0">
-                <a:solidFill>
-                  <a:srgbClr val="A09080"/>
-                </a:solidFill>
-                <a:latin typeface="Garamond" pitchFamily="34" charset="0"/>
-              </a:rPr>
-              <a:t>15</a:t>
-            </a:fld>
-            <a:endParaRPr lang="en-US" sz="900" dirty="0"/>
-          </a:p>
-        </p:txBody>
-      </p:sp>
     </p:spTree>
   </p:cSld>
   <p:clrMapOvr>
@@ -8904,43 +8645,6 @@
           </a:p>
         </p:txBody>
       </p:sp>
-      <p:sp>
-        <p:nvSpPr>
-          <p:cNvPr id="4000" name="PageNum"/>
-          <p:cNvSpPr/>
-          <p:nvPr/>
-        </p:nvSpPr>
-        <p:spPr>
-          <a:xfrm>
-            <a:off x="8100000" y="228600"/>
-            <a:ext cx="400000" cy="182880"/>
-          </a:xfrm>
-          <a:prstGeom prst="rect">
-            <a:avLst/>
-          </a:prstGeom>
-          <a:noFill/>
-          <a:ln/>
-        </p:spPr>
-        <p:txBody>
-          <a:bodyPr wrap="square" lIns="0" tIns="0" rIns="0" bIns="0" rtlCol="0" anchor="ctr"/>
-          <a:lstStyle/>
-          <a:p>
-            <a:pPr marL="0" indent="0" algn="r">
-              <a:buNone/>
-            </a:pPr>
-            <a:fld id="{8EF38052-DCED-4C3F-8DE1-58BFDF95EE34}" type="slidenum">
-              <a:rPr lang="en-US" sz="900" dirty="0">
-                <a:solidFill>
-                  <a:srgbClr val="A09080"/>
-                </a:solidFill>
-                <a:latin typeface="Garamond" pitchFamily="34" charset="0"/>
-              </a:rPr>
-              <a:t>16</a:t>
-            </a:fld>
-            <a:endParaRPr lang="en-US" sz="900" dirty="0"/>
-          </a:p>
-        </p:txBody>
-      </p:sp>
     </p:spTree>
   </p:cSld>
   <p:clrMapOvr>
@@ -9921,43 +9625,6 @@
           </a:p>
         </p:txBody>
       </p:sp>
-      <p:sp>
-        <p:nvSpPr>
-          <p:cNvPr id="4000" name="PageNum"/>
-          <p:cNvSpPr/>
-          <p:nvPr/>
-        </p:nvSpPr>
-        <p:spPr>
-          <a:xfrm>
-            <a:off x="8100000" y="228600"/>
-            <a:ext cx="400000" cy="182880"/>
-          </a:xfrm>
-          <a:prstGeom prst="rect">
-            <a:avLst/>
-          </a:prstGeom>
-          <a:noFill/>
-          <a:ln/>
-        </p:spPr>
-        <p:txBody>
-          <a:bodyPr wrap="square" lIns="0" tIns="0" rIns="0" bIns="0" rtlCol="0" anchor="ctr"/>
-          <a:lstStyle/>
-          <a:p>
-            <a:pPr marL="0" indent="0" algn="r">
-              <a:buNone/>
-            </a:pPr>
-            <a:fld id="{1F5FE1EE-AC37-4828-8A4A-331FADDB9AB8}" type="slidenum">
-              <a:rPr lang="en-US" sz="900" dirty="0">
-                <a:solidFill>
-                  <a:srgbClr val="A09080"/>
-                </a:solidFill>
-                <a:latin typeface="Garamond" pitchFamily="34" charset="0"/>
-              </a:rPr>
-              <a:t>17</a:t>
-            </a:fld>
-            <a:endParaRPr lang="en-US" sz="900" dirty="0"/>
-          </a:p>
-        </p:txBody>
-      </p:sp>
     </p:spTree>
   </p:cSld>
   <p:clrMapOvr>
@@ -10938,43 +10605,6 @@
           </a:p>
         </p:txBody>
       </p:sp>
-      <p:sp>
-        <p:nvSpPr>
-          <p:cNvPr id="4000" name="PageNum"/>
-          <p:cNvSpPr/>
-          <p:nvPr/>
-        </p:nvSpPr>
-        <p:spPr>
-          <a:xfrm>
-            <a:off x="8100000" y="228600"/>
-            <a:ext cx="400000" cy="182880"/>
-          </a:xfrm>
-          <a:prstGeom prst="rect">
-            <a:avLst/>
-          </a:prstGeom>
-          <a:noFill/>
-          <a:ln/>
-        </p:spPr>
-        <p:txBody>
-          <a:bodyPr wrap="square" lIns="0" tIns="0" rIns="0" bIns="0" rtlCol="0" anchor="ctr"/>
-          <a:lstStyle/>
-          <a:p>
-            <a:pPr marL="0" indent="0" algn="r">
-              <a:buNone/>
-            </a:pPr>
-            <a:fld id="{060B3964-EC7F-4938-90B2-688FD8F016B3}" type="slidenum">
-              <a:rPr lang="en-US" sz="900" dirty="0">
-                <a:solidFill>
-                  <a:srgbClr val="A09080"/>
-                </a:solidFill>
-                <a:latin typeface="Garamond" pitchFamily="34" charset="0"/>
-              </a:rPr>
-              <a:t>18</a:t>
-            </a:fld>
-            <a:endParaRPr lang="en-US" sz="900" dirty="0"/>
-          </a:p>
-        </p:txBody>
-      </p:sp>
     </p:spTree>
   </p:cSld>
   <p:clrMapOvr>
@@ -11955,43 +11585,6 @@
           </a:p>
         </p:txBody>
       </p:sp>
-      <p:sp>
-        <p:nvSpPr>
-          <p:cNvPr id="4000" name="PageNum"/>
-          <p:cNvSpPr/>
-          <p:nvPr/>
-        </p:nvSpPr>
-        <p:spPr>
-          <a:xfrm>
-            <a:off x="8100000" y="228600"/>
-            <a:ext cx="400000" cy="182880"/>
-          </a:xfrm>
-          <a:prstGeom prst="rect">
-            <a:avLst/>
-          </a:prstGeom>
-          <a:noFill/>
-          <a:ln/>
-        </p:spPr>
-        <p:txBody>
-          <a:bodyPr wrap="square" lIns="0" tIns="0" rIns="0" bIns="0" rtlCol="0" anchor="ctr"/>
-          <a:lstStyle/>
-          <a:p>
-            <a:pPr marL="0" indent="0" algn="r">
-              <a:buNone/>
-            </a:pPr>
-            <a:fld id="{1A7A3AB4-9438-4AFB-B13C-B1B6CCEE65A1}" type="slidenum">
-              <a:rPr lang="en-US" sz="900" dirty="0">
-                <a:solidFill>
-                  <a:srgbClr val="A09080"/>
-                </a:solidFill>
-                <a:latin typeface="Garamond" pitchFamily="34" charset="0"/>
-              </a:rPr>
-              <a:t>19</a:t>
-            </a:fld>
-            <a:endParaRPr lang="en-US" sz="900" dirty="0"/>
-          </a:p>
-        </p:txBody>
-      </p:sp>
     </p:spTree>
   </p:cSld>
   <p:clrMapOvr>
@@ -12973,43 +12566,6 @@
           </a:p>
         </p:txBody>
       </p:sp>
-      <p:sp>
-        <p:nvSpPr>
-          <p:cNvPr id="4000" name="PageNum"/>
-          <p:cNvSpPr/>
-          <p:nvPr/>
-        </p:nvSpPr>
-        <p:spPr>
-          <a:xfrm>
-            <a:off x="8100000" y="228600"/>
-            <a:ext cx="400000" cy="182880"/>
-          </a:xfrm>
-          <a:prstGeom prst="rect">
-            <a:avLst/>
-          </a:prstGeom>
-          <a:noFill/>
-          <a:ln/>
-        </p:spPr>
-        <p:txBody>
-          <a:bodyPr wrap="square" lIns="0" tIns="0" rIns="0" bIns="0" rtlCol="0" anchor="ctr"/>
-          <a:lstStyle/>
-          <a:p>
-            <a:pPr marL="0" indent="0" algn="r">
-              <a:buNone/>
-            </a:pPr>
-            <a:fld id="{F8CF56B3-A7CB-45F7-9B89-43751FC461CF}" type="slidenum">
-              <a:rPr lang="en-US" sz="900" dirty="0">
-                <a:solidFill>
-                  <a:srgbClr val="A09080"/>
-                </a:solidFill>
-                <a:latin typeface="Garamond" pitchFamily="34" charset="0"/>
-              </a:rPr>
-              <a:t>2</a:t>
-            </a:fld>
-            <a:endParaRPr lang="en-US" sz="900" dirty="0"/>
-          </a:p>
-        </p:txBody>
-      </p:sp>
     </p:spTree>
   </p:cSld>
   <p:clrMapOvr>
@@ -13990,43 +13546,6 @@
           </a:p>
         </p:txBody>
       </p:sp>
-      <p:sp>
-        <p:nvSpPr>
-          <p:cNvPr id="4000" name="PageNum"/>
-          <p:cNvSpPr/>
-          <p:nvPr/>
-        </p:nvSpPr>
-        <p:spPr>
-          <a:xfrm>
-            <a:off x="8100000" y="228600"/>
-            <a:ext cx="400000" cy="182880"/>
-          </a:xfrm>
-          <a:prstGeom prst="rect">
-            <a:avLst/>
-          </a:prstGeom>
-          <a:noFill/>
-          <a:ln/>
-        </p:spPr>
-        <p:txBody>
-          <a:bodyPr wrap="square" lIns="0" tIns="0" rIns="0" bIns="0" rtlCol="0" anchor="ctr"/>
-          <a:lstStyle/>
-          <a:p>
-            <a:pPr marL="0" indent="0" algn="r">
-              <a:buNone/>
-            </a:pPr>
-            <a:fld id="{7239190C-E64A-4F34-B0FE-6800D0528CA2}" type="slidenum">
-              <a:rPr lang="en-US" sz="900" dirty="0">
-                <a:solidFill>
-                  <a:srgbClr val="A09080"/>
-                </a:solidFill>
-                <a:latin typeface="Garamond" pitchFamily="34" charset="0"/>
-              </a:rPr>
-              <a:t>20</a:t>
-            </a:fld>
-            <a:endParaRPr lang="en-US" sz="900" dirty="0"/>
-          </a:p>
-        </p:txBody>
-      </p:sp>
     </p:spTree>
   </p:cSld>
   <p:clrMapOvr>
@@ -15122,43 +14641,6 @@
           </a:p>
         </p:txBody>
       </p:sp>
-      <p:sp>
-        <p:nvSpPr>
-          <p:cNvPr id="4000" name="PageNum"/>
-          <p:cNvSpPr/>
-          <p:nvPr/>
-        </p:nvSpPr>
-        <p:spPr>
-          <a:xfrm>
-            <a:off x="8100000" y="228600"/>
-            <a:ext cx="400000" cy="182880"/>
-          </a:xfrm>
-          <a:prstGeom prst="rect">
-            <a:avLst/>
-          </a:prstGeom>
-          <a:noFill/>
-          <a:ln/>
-        </p:spPr>
-        <p:txBody>
-          <a:bodyPr wrap="square" lIns="0" tIns="0" rIns="0" bIns="0" rtlCol="0" anchor="ctr"/>
-          <a:lstStyle/>
-          <a:p>
-            <a:pPr marL="0" indent="0" algn="r">
-              <a:buNone/>
-            </a:pPr>
-            <a:fld id="{5DBD2BA1-A11D-48CD-80B3-11759F539ECF}" type="slidenum">
-              <a:rPr lang="en-US" sz="900" dirty="0">
-                <a:solidFill>
-                  <a:srgbClr val="A09080"/>
-                </a:solidFill>
-                <a:latin typeface="Garamond" pitchFamily="34" charset="0"/>
-              </a:rPr>
-              <a:t>21</a:t>
-            </a:fld>
-            <a:endParaRPr lang="en-US" sz="900" dirty="0"/>
-          </a:p>
-        </p:txBody>
-      </p:sp>
     </p:spTree>
   </p:cSld>
   <p:clrMapOvr>
@@ -16139,43 +15621,6 @@
           </a:p>
         </p:txBody>
       </p:sp>
-      <p:sp>
-        <p:nvSpPr>
-          <p:cNvPr id="4000" name="PageNum"/>
-          <p:cNvSpPr/>
-          <p:nvPr/>
-        </p:nvSpPr>
-        <p:spPr>
-          <a:xfrm>
-            <a:off x="8100000" y="228600"/>
-            <a:ext cx="400000" cy="182880"/>
-          </a:xfrm>
-          <a:prstGeom prst="rect">
-            <a:avLst/>
-          </a:prstGeom>
-          <a:noFill/>
-          <a:ln/>
-        </p:spPr>
-        <p:txBody>
-          <a:bodyPr wrap="square" lIns="0" tIns="0" rIns="0" bIns="0" rtlCol="0" anchor="ctr"/>
-          <a:lstStyle/>
-          <a:p>
-            <a:pPr marL="0" indent="0" algn="r">
-              <a:buNone/>
-            </a:pPr>
-            <a:fld id="{27F81A08-CA10-4C40-9716-CEF0B6226ED5}" type="slidenum">
-              <a:rPr lang="en-US" sz="900" dirty="0">
-                <a:solidFill>
-                  <a:srgbClr val="A09080"/>
-                </a:solidFill>
-                <a:latin typeface="Garamond" pitchFamily="34" charset="0"/>
-              </a:rPr>
-              <a:t>22</a:t>
-            </a:fld>
-            <a:endParaRPr lang="en-US" sz="900" dirty="0"/>
-          </a:p>
-        </p:txBody>
-      </p:sp>
     </p:spTree>
   </p:cSld>
   <p:clrMapOvr>
@@ -17156,43 +16601,6 @@
           </a:p>
         </p:txBody>
       </p:sp>
-      <p:sp>
-        <p:nvSpPr>
-          <p:cNvPr id="4000" name="PageNum"/>
-          <p:cNvSpPr/>
-          <p:nvPr/>
-        </p:nvSpPr>
-        <p:spPr>
-          <a:xfrm>
-            <a:off x="8100000" y="228600"/>
-            <a:ext cx="400000" cy="182880"/>
-          </a:xfrm>
-          <a:prstGeom prst="rect">
-            <a:avLst/>
-          </a:prstGeom>
-          <a:noFill/>
-          <a:ln/>
-        </p:spPr>
-        <p:txBody>
-          <a:bodyPr wrap="square" lIns="0" tIns="0" rIns="0" bIns="0" rtlCol="0" anchor="ctr"/>
-          <a:lstStyle/>
-          <a:p>
-            <a:pPr marL="0" indent="0" algn="r">
-              <a:buNone/>
-            </a:pPr>
-            <a:fld id="{FD783363-F5A6-471B-AB7A-9884296F1DBD}" type="slidenum">
-              <a:rPr lang="en-US" sz="900" dirty="0">
-                <a:solidFill>
-                  <a:srgbClr val="A09080"/>
-                </a:solidFill>
-                <a:latin typeface="Garamond" pitchFamily="34" charset="0"/>
-              </a:rPr>
-              <a:t>23</a:t>
-            </a:fld>
-            <a:endParaRPr lang="en-US" sz="900" dirty="0"/>
-          </a:p>
-        </p:txBody>
-      </p:sp>
     </p:spTree>
   </p:cSld>
   <p:clrMapOvr>
@@ -18173,43 +17581,6 @@
           </a:p>
         </p:txBody>
       </p:sp>
-      <p:sp>
-        <p:nvSpPr>
-          <p:cNvPr id="4000" name="PageNum"/>
-          <p:cNvSpPr/>
-          <p:nvPr/>
-        </p:nvSpPr>
-        <p:spPr>
-          <a:xfrm>
-            <a:off x="8100000" y="228600"/>
-            <a:ext cx="400000" cy="182880"/>
-          </a:xfrm>
-          <a:prstGeom prst="rect">
-            <a:avLst/>
-          </a:prstGeom>
-          <a:noFill/>
-          <a:ln/>
-        </p:spPr>
-        <p:txBody>
-          <a:bodyPr wrap="square" lIns="0" tIns="0" rIns="0" bIns="0" rtlCol="0" anchor="ctr"/>
-          <a:lstStyle/>
-          <a:p>
-            <a:pPr marL="0" indent="0" algn="r">
-              <a:buNone/>
-            </a:pPr>
-            <a:fld id="{0E3254FC-1AF6-4A6F-9780-B7E7082C1148}" type="slidenum">
-              <a:rPr lang="en-US" sz="900" dirty="0">
-                <a:solidFill>
-                  <a:srgbClr val="A09080"/>
-                </a:solidFill>
-                <a:latin typeface="Garamond" pitchFamily="34" charset="0"/>
-              </a:rPr>
-              <a:t>24</a:t>
-            </a:fld>
-            <a:endParaRPr lang="en-US" sz="900" dirty="0"/>
-          </a:p>
-        </p:txBody>
-      </p:sp>
     </p:spTree>
   </p:cSld>
   <p:clrMapOvr>
@@ -19120,43 +18491,6 @@
           </a:p>
         </p:txBody>
       </p:sp>
-      <p:sp>
-        <p:nvSpPr>
-          <p:cNvPr id="4000" name="PageNum"/>
-          <p:cNvSpPr/>
-          <p:nvPr/>
-        </p:nvSpPr>
-        <p:spPr>
-          <a:xfrm>
-            <a:off x="8100000" y="228600"/>
-            <a:ext cx="400000" cy="182880"/>
-          </a:xfrm>
-          <a:prstGeom prst="rect">
-            <a:avLst/>
-          </a:prstGeom>
-          <a:noFill/>
-          <a:ln/>
-        </p:spPr>
-        <p:txBody>
-          <a:bodyPr wrap="square" lIns="0" tIns="0" rIns="0" bIns="0" rtlCol="0" anchor="ctr"/>
-          <a:lstStyle/>
-          <a:p>
-            <a:pPr marL="0" indent="0" algn="r">
-              <a:buNone/>
-            </a:pPr>
-            <a:fld id="{203B21EE-1EA1-497D-B37B-F0DB043D4200}" type="slidenum">
-              <a:rPr lang="en-US" sz="900" dirty="0">
-                <a:solidFill>
-                  <a:srgbClr val="A09080"/>
-                </a:solidFill>
-                <a:latin typeface="Garamond" pitchFamily="34" charset="0"/>
-              </a:rPr>
-              <a:t>25</a:t>
-            </a:fld>
-            <a:endParaRPr lang="en-US" sz="900" dirty="0"/>
-          </a:p>
-        </p:txBody>
-      </p:sp>
     </p:spTree>
   </p:cSld>
   <p:clrMapOvr>
@@ -20241,43 +19575,6 @@
           </a:p>
         </p:txBody>
       </p:sp>
-      <p:sp>
-        <p:nvSpPr>
-          <p:cNvPr id="4000" name="PageNum"/>
-          <p:cNvSpPr/>
-          <p:nvPr/>
-        </p:nvSpPr>
-        <p:spPr>
-          <a:xfrm>
-            <a:off x="8100000" y="228600"/>
-            <a:ext cx="400000" cy="182880"/>
-          </a:xfrm>
-          <a:prstGeom prst="rect">
-            <a:avLst/>
-          </a:prstGeom>
-          <a:noFill/>
-          <a:ln/>
-        </p:spPr>
-        <p:txBody>
-          <a:bodyPr wrap="square" lIns="0" tIns="0" rIns="0" bIns="0" rtlCol="0" anchor="ctr"/>
-          <a:lstStyle/>
-          <a:p>
-            <a:pPr marL="0" indent="0" algn="r">
-              <a:buNone/>
-            </a:pPr>
-            <a:fld id="{3B5065AC-3556-4025-A6E8-456BCC761E00}" type="slidenum">
-              <a:rPr lang="en-US" sz="900" dirty="0">
-                <a:solidFill>
-                  <a:srgbClr val="A09080"/>
-                </a:solidFill>
-                <a:latin typeface="Garamond" pitchFamily="34" charset="0"/>
-              </a:rPr>
-              <a:t>26</a:t>
-            </a:fld>
-            <a:endParaRPr lang="en-US" sz="900" dirty="0"/>
-          </a:p>
-        </p:txBody>
-      </p:sp>
     </p:spTree>
   </p:cSld>
   <p:clrMapOvr>
@@ -21428,43 +20725,6 @@
           </a:p>
         </p:txBody>
       </p:sp>
-      <p:sp>
-        <p:nvSpPr>
-          <p:cNvPr id="4000" name="PageNum"/>
-          <p:cNvSpPr/>
-          <p:nvPr/>
-        </p:nvSpPr>
-        <p:spPr>
-          <a:xfrm>
-            <a:off x="8100000" y="228600"/>
-            <a:ext cx="400000" cy="182880"/>
-          </a:xfrm>
-          <a:prstGeom prst="rect">
-            <a:avLst/>
-          </a:prstGeom>
-          <a:noFill/>
-          <a:ln/>
-        </p:spPr>
-        <p:txBody>
-          <a:bodyPr wrap="square" lIns="0" tIns="0" rIns="0" bIns="0" rtlCol="0" anchor="ctr"/>
-          <a:lstStyle/>
-          <a:p>
-            <a:pPr marL="0" indent="0" algn="r">
-              <a:buNone/>
-            </a:pPr>
-            <a:fld id="{E71B2DFC-2D0F-43B9-A9B8-EB8C2E04E1D1}" type="slidenum">
-              <a:rPr lang="en-US" sz="900" dirty="0">
-                <a:solidFill>
-                  <a:srgbClr val="A09080"/>
-                </a:solidFill>
-                <a:latin typeface="Garamond" pitchFamily="34" charset="0"/>
-              </a:rPr>
-              <a:t>27</a:t>
-            </a:fld>
-            <a:endParaRPr lang="en-US" sz="900" dirty="0"/>
-          </a:p>
-        </p:txBody>
-      </p:sp>
     </p:spTree>
   </p:cSld>
   <p:clrMapOvr>
@@ -22435,43 +21695,6 @@
           </a:p>
         </p:txBody>
       </p:sp>
-      <p:sp>
-        <p:nvSpPr>
-          <p:cNvPr id="4000" name="PageNum"/>
-          <p:cNvSpPr/>
-          <p:nvPr/>
-        </p:nvSpPr>
-        <p:spPr>
-          <a:xfrm>
-            <a:off x="8100000" y="228600"/>
-            <a:ext cx="400000" cy="182880"/>
-          </a:xfrm>
-          <a:prstGeom prst="rect">
-            <a:avLst/>
-          </a:prstGeom>
-          <a:noFill/>
-          <a:ln/>
-        </p:spPr>
-        <p:txBody>
-          <a:bodyPr wrap="square" lIns="0" tIns="0" rIns="0" bIns="0" rtlCol="0" anchor="ctr"/>
-          <a:lstStyle/>
-          <a:p>
-            <a:pPr marL="0" indent="0" algn="r">
-              <a:buNone/>
-            </a:pPr>
-            <a:fld id="{7F0E5800-6E7C-4513-964B-AEB327595914}" type="slidenum">
-              <a:rPr lang="en-US" sz="900" dirty="0">
-                <a:solidFill>
-                  <a:srgbClr val="A09080"/>
-                </a:solidFill>
-                <a:latin typeface="Garamond" pitchFamily="34" charset="0"/>
-              </a:rPr>
-              <a:t>28</a:t>
-            </a:fld>
-            <a:endParaRPr lang="en-US" sz="900" dirty="0"/>
-          </a:p>
-        </p:txBody>
-      </p:sp>
     </p:spTree>
   </p:cSld>
   <p:clrMapOvr>
@@ -24163,43 +23386,6 @@
           </a:p>
         </p:txBody>
       </p:sp>
-      <p:sp>
-        <p:nvSpPr>
-          <p:cNvPr id="4000" name="PageNum"/>
-          <p:cNvSpPr/>
-          <p:nvPr/>
-        </p:nvSpPr>
-        <p:spPr>
-          <a:xfrm>
-            <a:off x="8100000" y="228600"/>
-            <a:ext cx="400000" cy="182880"/>
-          </a:xfrm>
-          <a:prstGeom prst="rect">
-            <a:avLst/>
-          </a:prstGeom>
-          <a:noFill/>
-          <a:ln/>
-        </p:spPr>
-        <p:txBody>
-          <a:bodyPr wrap="square" lIns="0" tIns="0" rIns="0" bIns="0" rtlCol="0" anchor="ctr"/>
-          <a:lstStyle/>
-          <a:p>
-            <a:pPr marL="0" indent="0" algn="r">
-              <a:buNone/>
-            </a:pPr>
-            <a:fld id="{0253C3B8-5C8D-4221-8CC6-C5A459846F25}" type="slidenum">
-              <a:rPr lang="en-US" sz="900" dirty="0">
-                <a:solidFill>
-                  <a:srgbClr val="A09080"/>
-                </a:solidFill>
-                <a:latin typeface="Garamond" pitchFamily="34" charset="0"/>
-              </a:rPr>
-              <a:t>29</a:t>
-            </a:fld>
-            <a:endParaRPr lang="en-US" sz="900" dirty="0"/>
-          </a:p>
-        </p:txBody>
-      </p:sp>
     </p:spTree>
   </p:cSld>
   <p:clrMapOvr>
@@ -25170,43 +24356,6 @@
           </a:p>
         </p:txBody>
       </p:sp>
-      <p:sp>
-        <p:nvSpPr>
-          <p:cNvPr id="4000" name="PageNum"/>
-          <p:cNvSpPr/>
-          <p:nvPr/>
-        </p:nvSpPr>
-        <p:spPr>
-          <a:xfrm>
-            <a:off x="8100000" y="228600"/>
-            <a:ext cx="400000" cy="182880"/>
-          </a:xfrm>
-          <a:prstGeom prst="rect">
-            <a:avLst/>
-          </a:prstGeom>
-          <a:noFill/>
-          <a:ln/>
-        </p:spPr>
-        <p:txBody>
-          <a:bodyPr wrap="square" lIns="0" tIns="0" rIns="0" bIns="0" rtlCol="0" anchor="ctr"/>
-          <a:lstStyle/>
-          <a:p>
-            <a:pPr marL="0" indent="0" algn="r">
-              <a:buNone/>
-            </a:pPr>
-            <a:fld id="{43FE5D50-7464-4A58-929F-5B681DAAB99D}" type="slidenum">
-              <a:rPr lang="en-US" sz="900" dirty="0">
-                <a:solidFill>
-                  <a:srgbClr val="A09080"/>
-                </a:solidFill>
-                <a:latin typeface="Garamond" pitchFamily="34" charset="0"/>
-              </a:rPr>
-              <a:t>3</a:t>
-            </a:fld>
-            <a:endParaRPr lang="en-US" sz="900" dirty="0"/>
-          </a:p>
-        </p:txBody>
-      </p:sp>
     </p:spTree>
   </p:cSld>
   <p:clrMapOvr>
@@ -26756,43 +25905,6 @@
           </a:p>
         </p:txBody>
       </p:sp>
-      <p:sp>
-        <p:nvSpPr>
-          <p:cNvPr id="4000" name="PageNum"/>
-          <p:cNvSpPr/>
-          <p:nvPr/>
-        </p:nvSpPr>
-        <p:spPr>
-          <a:xfrm>
-            <a:off x="8100000" y="228600"/>
-            <a:ext cx="400000" cy="182880"/>
-          </a:xfrm>
-          <a:prstGeom prst="rect">
-            <a:avLst/>
-          </a:prstGeom>
-          <a:noFill/>
-          <a:ln/>
-        </p:spPr>
-        <p:txBody>
-          <a:bodyPr wrap="square" lIns="0" tIns="0" rIns="0" bIns="0" rtlCol="0" anchor="ctr"/>
-          <a:lstStyle/>
-          <a:p>
-            <a:pPr marL="0" indent="0" algn="r">
-              <a:buNone/>
-            </a:pPr>
-            <a:fld id="{49461ABE-E96F-4FF0-857E-A3D6843347E2}" type="slidenum">
-              <a:rPr lang="en-US" sz="900" dirty="0">
-                <a:solidFill>
-                  <a:srgbClr val="A09080"/>
-                </a:solidFill>
-                <a:latin typeface="Garamond" pitchFamily="34" charset="0"/>
-              </a:rPr>
-              <a:t>30</a:t>
-            </a:fld>
-            <a:endParaRPr lang="en-US" sz="900" dirty="0"/>
-          </a:p>
-        </p:txBody>
-      </p:sp>
     </p:spTree>
   </p:cSld>
   <p:clrMapOvr>
@@ -27763,43 +26875,6 @@
           </a:p>
         </p:txBody>
       </p:sp>
-      <p:sp>
-        <p:nvSpPr>
-          <p:cNvPr id="4000" name="PageNum"/>
-          <p:cNvSpPr/>
-          <p:nvPr/>
-        </p:nvSpPr>
-        <p:spPr>
-          <a:xfrm>
-            <a:off x="8100000" y="228600"/>
-            <a:ext cx="400000" cy="182880"/>
-          </a:xfrm>
-          <a:prstGeom prst="rect">
-            <a:avLst/>
-          </a:prstGeom>
-          <a:noFill/>
-          <a:ln/>
-        </p:spPr>
-        <p:txBody>
-          <a:bodyPr wrap="square" lIns="0" tIns="0" rIns="0" bIns="0" rtlCol="0" anchor="ctr"/>
-          <a:lstStyle/>
-          <a:p>
-            <a:pPr marL="0" indent="0" algn="r">
-              <a:buNone/>
-            </a:pPr>
-            <a:fld id="{F1B486B1-65F9-444F-BB92-33973231EF53}" type="slidenum">
-              <a:rPr lang="en-US" sz="900" dirty="0">
-                <a:solidFill>
-                  <a:srgbClr val="A09080"/>
-                </a:solidFill>
-                <a:latin typeface="Garamond" pitchFamily="34" charset="0"/>
-              </a:rPr>
-              <a:t>31</a:t>
-            </a:fld>
-            <a:endParaRPr lang="en-US" sz="900" dirty="0"/>
-          </a:p>
-        </p:txBody>
-      </p:sp>
     </p:spTree>
   </p:cSld>
   <p:clrMapOvr>
@@ -28770,43 +27845,6 @@
           </a:p>
         </p:txBody>
       </p:sp>
-      <p:sp>
-        <p:nvSpPr>
-          <p:cNvPr id="4000" name="PageNum"/>
-          <p:cNvSpPr/>
-          <p:nvPr/>
-        </p:nvSpPr>
-        <p:spPr>
-          <a:xfrm>
-            <a:off x="8100000" y="228600"/>
-            <a:ext cx="400000" cy="182880"/>
-          </a:xfrm>
-          <a:prstGeom prst="rect">
-            <a:avLst/>
-          </a:prstGeom>
-          <a:noFill/>
-          <a:ln/>
-        </p:spPr>
-        <p:txBody>
-          <a:bodyPr wrap="square" lIns="0" tIns="0" rIns="0" bIns="0" rtlCol="0" anchor="ctr"/>
-          <a:lstStyle/>
-          <a:p>
-            <a:pPr marL="0" indent="0" algn="r">
-              <a:buNone/>
-            </a:pPr>
-            <a:fld id="{3283EC35-5CB0-48DC-BB59-F3D7D108B50F}" type="slidenum">
-              <a:rPr lang="en-US" sz="900" dirty="0">
-                <a:solidFill>
-                  <a:srgbClr val="A09080"/>
-                </a:solidFill>
-                <a:latin typeface="Garamond" pitchFamily="34" charset="0"/>
-              </a:rPr>
-              <a:t>32</a:t>
-            </a:fld>
-            <a:endParaRPr lang="en-US" sz="900" dirty="0"/>
-          </a:p>
-        </p:txBody>
-      </p:sp>
     </p:spTree>
   </p:cSld>
   <p:clrMapOvr>
@@ -29888,43 +28926,6 @@
           </a:p>
         </p:txBody>
       </p:sp>
-      <p:sp>
-        <p:nvSpPr>
-          <p:cNvPr id="4000" name="PageNum"/>
-          <p:cNvSpPr/>
-          <p:nvPr/>
-        </p:nvSpPr>
-        <p:spPr>
-          <a:xfrm>
-            <a:off x="8100000" y="228600"/>
-            <a:ext cx="400000" cy="182880"/>
-          </a:xfrm>
-          <a:prstGeom prst="rect">
-            <a:avLst/>
-          </a:prstGeom>
-          <a:noFill/>
-          <a:ln/>
-        </p:spPr>
-        <p:txBody>
-          <a:bodyPr wrap="square" lIns="0" tIns="0" rIns="0" bIns="0" rtlCol="0" anchor="ctr"/>
-          <a:lstStyle/>
-          <a:p>
-            <a:pPr marL="0" indent="0" algn="r">
-              <a:buNone/>
-            </a:pPr>
-            <a:fld id="{AC2EFD9C-DE98-48E9-B025-F862629C2ABF}" type="slidenum">
-              <a:rPr lang="en-US" sz="900" dirty="0">
-                <a:solidFill>
-                  <a:srgbClr val="A09080"/>
-                </a:solidFill>
-                <a:latin typeface="Garamond" pitchFamily="34" charset="0"/>
-              </a:rPr>
-              <a:t>33</a:t>
-            </a:fld>
-            <a:endParaRPr lang="en-US" sz="900" dirty="0"/>
-          </a:p>
-        </p:txBody>
-      </p:sp>
     </p:spTree>
   </p:cSld>
   <p:clrMapOvr>
@@ -31254,43 +30255,6 @@
           </a:p>
         </p:txBody>
       </p:sp>
-      <p:sp>
-        <p:nvSpPr>
-          <p:cNvPr id="4000" name="PageNum"/>
-          <p:cNvSpPr/>
-          <p:nvPr/>
-        </p:nvSpPr>
-        <p:spPr>
-          <a:xfrm>
-            <a:off x="8100000" y="228600"/>
-            <a:ext cx="400000" cy="182880"/>
-          </a:xfrm>
-          <a:prstGeom prst="rect">
-            <a:avLst/>
-          </a:prstGeom>
-          <a:noFill/>
-          <a:ln/>
-        </p:spPr>
-        <p:txBody>
-          <a:bodyPr wrap="square" lIns="0" tIns="0" rIns="0" bIns="0" rtlCol="0" anchor="ctr"/>
-          <a:lstStyle/>
-          <a:p>
-            <a:pPr marL="0" indent="0" algn="r">
-              <a:buNone/>
-            </a:pPr>
-            <a:fld id="{652F0E8E-D0A6-4729-9B61-C7F3A61FFE45}" type="slidenum">
-              <a:rPr lang="en-US" sz="900" dirty="0">
-                <a:solidFill>
-                  <a:srgbClr val="A09080"/>
-                </a:solidFill>
-                <a:latin typeface="Garamond" pitchFamily="34" charset="0"/>
-              </a:rPr>
-              <a:t>34</a:t>
-            </a:fld>
-            <a:endParaRPr lang="en-US" sz="900" dirty="0"/>
-          </a:p>
-        </p:txBody>
-      </p:sp>
     </p:spTree>
   </p:cSld>
   <p:clrMapOvr>
@@ -32859,43 +31823,6 @@
           </a:p>
         </p:txBody>
       </p:sp>
-      <p:sp>
-        <p:nvSpPr>
-          <p:cNvPr id="4000" name="PageNum"/>
-          <p:cNvSpPr/>
-          <p:nvPr/>
-        </p:nvSpPr>
-        <p:spPr>
-          <a:xfrm>
-            <a:off x="8100000" y="228600"/>
-            <a:ext cx="400000" cy="182880"/>
-          </a:xfrm>
-          <a:prstGeom prst="rect">
-            <a:avLst/>
-          </a:prstGeom>
-          <a:noFill/>
-          <a:ln/>
-        </p:spPr>
-        <p:txBody>
-          <a:bodyPr wrap="square" lIns="0" tIns="0" rIns="0" bIns="0" rtlCol="0" anchor="ctr"/>
-          <a:lstStyle/>
-          <a:p>
-            <a:pPr marL="0" indent="0" algn="r">
-              <a:buNone/>
-            </a:pPr>
-            <a:fld id="{FCA8993E-C9E7-4DF4-8036-55302EFDA385}" type="slidenum">
-              <a:rPr lang="en-US" sz="900" dirty="0">
-                <a:solidFill>
-                  <a:srgbClr val="A09080"/>
-                </a:solidFill>
-                <a:latin typeface="Garamond" pitchFamily="34" charset="0"/>
-              </a:rPr>
-              <a:t>35</a:t>
-            </a:fld>
-            <a:endParaRPr lang="en-US" sz="900" dirty="0"/>
-          </a:p>
-        </p:txBody>
-      </p:sp>
     </p:spTree>
   </p:cSld>
   <p:clrMapOvr>
@@ -34464,43 +33391,6 @@
           </a:p>
         </p:txBody>
       </p:sp>
-      <p:sp>
-        <p:nvSpPr>
-          <p:cNvPr id="4000" name="PageNum"/>
-          <p:cNvSpPr/>
-          <p:nvPr/>
-        </p:nvSpPr>
-        <p:spPr>
-          <a:xfrm>
-            <a:off x="8100000" y="228600"/>
-            <a:ext cx="400000" cy="182880"/>
-          </a:xfrm>
-          <a:prstGeom prst="rect">
-            <a:avLst/>
-          </a:prstGeom>
-          <a:noFill/>
-          <a:ln/>
-        </p:spPr>
-        <p:txBody>
-          <a:bodyPr wrap="square" lIns="0" tIns="0" rIns="0" bIns="0" rtlCol="0" anchor="ctr"/>
-          <a:lstStyle/>
-          <a:p>
-            <a:pPr marL="0" indent="0" algn="r">
-              <a:buNone/>
-            </a:pPr>
-            <a:fld id="{D162F7F8-DD44-4059-9EC7-C05E2583CF52}" type="slidenum">
-              <a:rPr lang="en-US" sz="900" dirty="0">
-                <a:solidFill>
-                  <a:srgbClr val="A09080"/>
-                </a:solidFill>
-                <a:latin typeface="Garamond" pitchFamily="34" charset="0"/>
-              </a:rPr>
-              <a:t>36</a:t>
-            </a:fld>
-            <a:endParaRPr lang="en-US" sz="900" dirty="0"/>
-          </a:p>
-        </p:txBody>
-      </p:sp>
     </p:spTree>
   </p:cSld>
   <p:clrMapOvr>
@@ -35738,43 +34628,6 @@
           </a:p>
         </p:txBody>
       </p:sp>
-      <p:sp>
-        <p:nvSpPr>
-          <p:cNvPr id="4000" name="PageNum"/>
-          <p:cNvSpPr/>
-          <p:nvPr/>
-        </p:nvSpPr>
-        <p:spPr>
-          <a:xfrm>
-            <a:off x="8100000" y="228600"/>
-            <a:ext cx="400000" cy="182880"/>
-          </a:xfrm>
-          <a:prstGeom prst="rect">
-            <a:avLst/>
-          </a:prstGeom>
-          <a:noFill/>
-          <a:ln/>
-        </p:spPr>
-        <p:txBody>
-          <a:bodyPr wrap="square" lIns="0" tIns="0" rIns="0" bIns="0" rtlCol="0" anchor="ctr"/>
-          <a:lstStyle/>
-          <a:p>
-            <a:pPr marL="0" indent="0" algn="r">
-              <a:buNone/>
-            </a:pPr>
-            <a:fld id="{C32ACC4E-BC06-4081-BBFF-B02BD7A99F3C}" type="slidenum">
-              <a:rPr lang="en-US" sz="900" dirty="0">
-                <a:solidFill>
-                  <a:srgbClr val="A09080"/>
-                </a:solidFill>
-                <a:latin typeface="Garamond" pitchFamily="34" charset="0"/>
-              </a:rPr>
-              <a:t>37</a:t>
-            </a:fld>
-            <a:endParaRPr lang="en-US" sz="900" dirty="0"/>
-          </a:p>
-        </p:txBody>
-      </p:sp>
     </p:spTree>
   </p:cSld>
   <p:clrMapOvr>
@@ -37090,43 +35943,6 @@
           </a:p>
         </p:txBody>
       </p:sp>
-      <p:sp>
-        <p:nvSpPr>
-          <p:cNvPr id="4000" name="PageNum"/>
-          <p:cNvSpPr/>
-          <p:nvPr/>
-        </p:nvSpPr>
-        <p:spPr>
-          <a:xfrm>
-            <a:off x="8100000" y="228600"/>
-            <a:ext cx="400000" cy="182880"/>
-          </a:xfrm>
-          <a:prstGeom prst="rect">
-            <a:avLst/>
-          </a:prstGeom>
-          <a:noFill/>
-          <a:ln/>
-        </p:spPr>
-        <p:txBody>
-          <a:bodyPr wrap="square" lIns="0" tIns="0" rIns="0" bIns="0" rtlCol="0" anchor="ctr"/>
-          <a:lstStyle/>
-          <a:p>
-            <a:pPr marL="0" indent="0" algn="r">
-              <a:buNone/>
-            </a:pPr>
-            <a:fld id="{04AE8A93-71BE-44CB-9438-2F3D17F0EE10}" type="slidenum">
-              <a:rPr lang="en-US" sz="900" dirty="0">
-                <a:solidFill>
-                  <a:srgbClr val="A09080"/>
-                </a:solidFill>
-                <a:latin typeface="Garamond" pitchFamily="34" charset="0"/>
-              </a:rPr>
-              <a:t>38</a:t>
-            </a:fld>
-            <a:endParaRPr lang="en-US" sz="900" dirty="0"/>
-          </a:p>
-        </p:txBody>
-      </p:sp>
     </p:spTree>
   </p:cSld>
   <p:clrMapOvr>
@@ -38594,43 +37410,6 @@
           </a:p>
         </p:txBody>
       </p:sp>
-      <p:sp>
-        <p:nvSpPr>
-          <p:cNvPr id="4000" name="PageNum"/>
-          <p:cNvSpPr/>
-          <p:nvPr/>
-        </p:nvSpPr>
-        <p:spPr>
-          <a:xfrm>
-            <a:off x="8100000" y="228600"/>
-            <a:ext cx="400000" cy="182880"/>
-          </a:xfrm>
-          <a:prstGeom prst="rect">
-            <a:avLst/>
-          </a:prstGeom>
-          <a:noFill/>
-          <a:ln/>
-        </p:spPr>
-        <p:txBody>
-          <a:bodyPr wrap="square" lIns="0" tIns="0" rIns="0" bIns="0" rtlCol="0" anchor="ctr"/>
-          <a:lstStyle/>
-          <a:p>
-            <a:pPr marL="0" indent="0" algn="r">
-              <a:buNone/>
-            </a:pPr>
-            <a:fld id="{355E9B36-ECFC-4410-B165-2E38CACF8D08}" type="slidenum">
-              <a:rPr lang="en-US" sz="900" dirty="0">
-                <a:solidFill>
-                  <a:srgbClr val="A09080"/>
-                </a:solidFill>
-                <a:latin typeface="Garamond" pitchFamily="34" charset="0"/>
-              </a:rPr>
-              <a:t>39</a:t>
-            </a:fld>
-            <a:endParaRPr lang="en-US" sz="900" dirty="0"/>
-          </a:p>
-        </p:txBody>
-      </p:sp>
     </p:spTree>
   </p:cSld>
   <p:clrMapOvr>
@@ -39601,43 +38380,6 @@
           </a:p>
         </p:txBody>
       </p:sp>
-      <p:sp>
-        <p:nvSpPr>
-          <p:cNvPr id="4000" name="PageNum"/>
-          <p:cNvSpPr/>
-          <p:nvPr/>
-        </p:nvSpPr>
-        <p:spPr>
-          <a:xfrm>
-            <a:off x="8100000" y="228600"/>
-            <a:ext cx="400000" cy="182880"/>
-          </a:xfrm>
-          <a:prstGeom prst="rect">
-            <a:avLst/>
-          </a:prstGeom>
-          <a:noFill/>
-          <a:ln/>
-        </p:spPr>
-        <p:txBody>
-          <a:bodyPr wrap="square" lIns="0" tIns="0" rIns="0" bIns="0" rtlCol="0" anchor="ctr"/>
-          <a:lstStyle/>
-          <a:p>
-            <a:pPr marL="0" indent="0" algn="r">
-              <a:buNone/>
-            </a:pPr>
-            <a:fld id="{DA74F641-9C42-4F04-84CC-F5337ECABD29}" type="slidenum">
-              <a:rPr lang="en-US" sz="900" dirty="0">
-                <a:solidFill>
-                  <a:srgbClr val="A09080"/>
-                </a:solidFill>
-                <a:latin typeface="Garamond" pitchFamily="34" charset="0"/>
-              </a:rPr>
-              <a:t>4</a:t>
-            </a:fld>
-            <a:endParaRPr lang="en-US" sz="900" dirty="0"/>
-          </a:p>
-        </p:txBody>
-      </p:sp>
     </p:spTree>
   </p:cSld>
   <p:clrMapOvr>
@@ -40797,43 +39539,6 @@
           </a:p>
         </p:txBody>
       </p:sp>
-      <p:sp>
-        <p:nvSpPr>
-          <p:cNvPr id="4000" name="PageNum"/>
-          <p:cNvSpPr/>
-          <p:nvPr/>
-        </p:nvSpPr>
-        <p:spPr>
-          <a:xfrm>
-            <a:off x="8100000" y="228600"/>
-            <a:ext cx="400000" cy="182880"/>
-          </a:xfrm>
-          <a:prstGeom prst="rect">
-            <a:avLst/>
-          </a:prstGeom>
-          <a:noFill/>
-          <a:ln/>
-        </p:spPr>
-        <p:txBody>
-          <a:bodyPr wrap="square" lIns="0" tIns="0" rIns="0" bIns="0" rtlCol="0" anchor="ctr"/>
-          <a:lstStyle/>
-          <a:p>
-            <a:pPr marL="0" indent="0" algn="r">
-              <a:buNone/>
-            </a:pPr>
-            <a:fld id="{1D23A18B-A4A7-4210-BB02-4A714D0B6DE0}" type="slidenum">
-              <a:rPr lang="en-US" sz="900" dirty="0">
-                <a:solidFill>
-                  <a:srgbClr val="A09080"/>
-                </a:solidFill>
-                <a:latin typeface="Garamond" pitchFamily="34" charset="0"/>
-              </a:rPr>
-              <a:t>40</a:t>
-            </a:fld>
-            <a:endParaRPr lang="en-US" sz="900" dirty="0"/>
-          </a:p>
-        </p:txBody>
-      </p:sp>
     </p:spTree>
   </p:cSld>
   <p:clrMapOvr>
@@ -41993,43 +40698,6 @@
           </a:p>
         </p:txBody>
       </p:sp>
-      <p:sp>
-        <p:nvSpPr>
-          <p:cNvPr id="4000" name="PageNum"/>
-          <p:cNvSpPr/>
-          <p:nvPr/>
-        </p:nvSpPr>
-        <p:spPr>
-          <a:xfrm>
-            <a:off x="8100000" y="228600"/>
-            <a:ext cx="400000" cy="182880"/>
-          </a:xfrm>
-          <a:prstGeom prst="rect">
-            <a:avLst/>
-          </a:prstGeom>
-          <a:noFill/>
-          <a:ln/>
-        </p:spPr>
-        <p:txBody>
-          <a:bodyPr wrap="square" lIns="0" tIns="0" rIns="0" bIns="0" rtlCol="0" anchor="ctr"/>
-          <a:lstStyle/>
-          <a:p>
-            <a:pPr marL="0" indent="0" algn="r">
-              <a:buNone/>
-            </a:pPr>
-            <a:fld id="{CD0746E8-FB33-4697-A845-8B97A0CDD877}" type="slidenum">
-              <a:rPr lang="en-US" sz="900" dirty="0">
-                <a:solidFill>
-                  <a:srgbClr val="A09080"/>
-                </a:solidFill>
-                <a:latin typeface="Garamond" pitchFamily="34" charset="0"/>
-              </a:rPr>
-              <a:t>41</a:t>
-            </a:fld>
-            <a:endParaRPr lang="en-US" sz="900" dirty="0"/>
-          </a:p>
-        </p:txBody>
-      </p:sp>
     </p:spTree>
   </p:cSld>
   <p:clrMapOvr>
@@ -43598,43 +42266,6 @@
           </a:p>
         </p:txBody>
       </p:sp>
-      <p:sp>
-        <p:nvSpPr>
-          <p:cNvPr id="4000" name="PageNum"/>
-          <p:cNvSpPr/>
-          <p:nvPr/>
-        </p:nvSpPr>
-        <p:spPr>
-          <a:xfrm>
-            <a:off x="8100000" y="228600"/>
-            <a:ext cx="400000" cy="182880"/>
-          </a:xfrm>
-          <a:prstGeom prst="rect">
-            <a:avLst/>
-          </a:prstGeom>
-          <a:noFill/>
-          <a:ln/>
-        </p:spPr>
-        <p:txBody>
-          <a:bodyPr wrap="square" lIns="0" tIns="0" rIns="0" bIns="0" rtlCol="0" anchor="ctr"/>
-          <a:lstStyle/>
-          <a:p>
-            <a:pPr marL="0" indent="0" algn="r">
-              <a:buNone/>
-            </a:pPr>
-            <a:fld id="{9EAD54F2-8A73-4A05-860B-48B0ACA899B1}" type="slidenum">
-              <a:rPr lang="en-US" sz="900" dirty="0">
-                <a:solidFill>
-                  <a:srgbClr val="A09080"/>
-                </a:solidFill>
-                <a:latin typeface="Garamond" pitchFamily="34" charset="0"/>
-              </a:rPr>
-              <a:t>42</a:t>
-            </a:fld>
-            <a:endParaRPr lang="en-US" sz="900" dirty="0"/>
-          </a:p>
-        </p:txBody>
-      </p:sp>
     </p:spTree>
   </p:cSld>
   <p:clrMapOvr>
@@ -45203,43 +43834,6 @@
           </a:p>
         </p:txBody>
       </p:sp>
-      <p:sp>
-        <p:nvSpPr>
-          <p:cNvPr id="4000" name="PageNum"/>
-          <p:cNvSpPr/>
-          <p:nvPr/>
-        </p:nvSpPr>
-        <p:spPr>
-          <a:xfrm>
-            <a:off x="8100000" y="228600"/>
-            <a:ext cx="400000" cy="182880"/>
-          </a:xfrm>
-          <a:prstGeom prst="rect">
-            <a:avLst/>
-          </a:prstGeom>
-          <a:noFill/>
-          <a:ln/>
-        </p:spPr>
-        <p:txBody>
-          <a:bodyPr wrap="square" lIns="0" tIns="0" rIns="0" bIns="0" rtlCol="0" anchor="ctr"/>
-          <a:lstStyle/>
-          <a:p>
-            <a:pPr marL="0" indent="0" algn="r">
-              <a:buNone/>
-            </a:pPr>
-            <a:fld id="{D0FFA242-2194-4BCB-BBE0-A486AE4D7D7C}" type="slidenum">
-              <a:rPr lang="en-US" sz="900" dirty="0">
-                <a:solidFill>
-                  <a:srgbClr val="A09080"/>
-                </a:solidFill>
-                <a:latin typeface="Garamond" pitchFamily="34" charset="0"/>
-              </a:rPr>
-              <a:t>43</a:t>
-            </a:fld>
-            <a:endParaRPr lang="en-US" sz="900" dirty="0"/>
-          </a:p>
-        </p:txBody>
-      </p:sp>
     </p:spTree>
   </p:cSld>
   <p:clrMapOvr>
@@ -46292,43 +44886,6 @@
           </a:p>
         </p:txBody>
       </p:sp>
-      <p:sp>
-        <p:nvSpPr>
-          <p:cNvPr id="4000" name="PageNum"/>
-          <p:cNvSpPr/>
-          <p:nvPr/>
-        </p:nvSpPr>
-        <p:spPr>
-          <a:xfrm>
-            <a:off x="8100000" y="228600"/>
-            <a:ext cx="400000" cy="182880"/>
-          </a:xfrm>
-          <a:prstGeom prst="rect">
-            <a:avLst/>
-          </a:prstGeom>
-          <a:noFill/>
-          <a:ln/>
-        </p:spPr>
-        <p:txBody>
-          <a:bodyPr wrap="square" lIns="0" tIns="0" rIns="0" bIns="0" rtlCol="0" anchor="ctr"/>
-          <a:lstStyle/>
-          <a:p>
-            <a:pPr marL="0" indent="0" algn="r">
-              <a:buNone/>
-            </a:pPr>
-            <a:fld id="{BA8EF2CD-F7BB-4704-899A-4334EF1D2B81}" type="slidenum">
-              <a:rPr lang="en-US" sz="900" dirty="0">
-                <a:solidFill>
-                  <a:srgbClr val="A09080"/>
-                </a:solidFill>
-                <a:latin typeface="Garamond" pitchFamily="34" charset="0"/>
-              </a:rPr>
-              <a:t>44</a:t>
-            </a:fld>
-            <a:endParaRPr lang="en-US" sz="900" dirty="0"/>
-          </a:p>
-        </p:txBody>
-      </p:sp>
     </p:spTree>
   </p:cSld>
   <p:clrMapOvr>
@@ -47244,43 +45801,6 @@
           </a:p>
         </p:txBody>
       </p:sp>
-      <p:sp>
-        <p:nvSpPr>
-          <p:cNvPr id="4000" name="PageNum"/>
-          <p:cNvSpPr/>
-          <p:nvPr/>
-        </p:nvSpPr>
-        <p:spPr>
-          <a:xfrm>
-            <a:off x="8100000" y="228600"/>
-            <a:ext cx="400000" cy="182880"/>
-          </a:xfrm>
-          <a:prstGeom prst="rect">
-            <a:avLst/>
-          </a:prstGeom>
-          <a:noFill/>
-          <a:ln/>
-        </p:spPr>
-        <p:txBody>
-          <a:bodyPr wrap="square" lIns="0" tIns="0" rIns="0" bIns="0" rtlCol="0" anchor="ctr"/>
-          <a:lstStyle/>
-          <a:p>
-            <a:pPr marL="0" indent="0" algn="r">
-              <a:buNone/>
-            </a:pPr>
-            <a:fld id="{443E28BE-825B-423B-81C2-BAE95C6938AD}" type="slidenum">
-              <a:rPr lang="en-US" sz="900" dirty="0">
-                <a:solidFill>
-                  <a:srgbClr val="A09080"/>
-                </a:solidFill>
-                <a:latin typeface="Garamond" pitchFamily="34" charset="0"/>
-              </a:rPr>
-              <a:t>45</a:t>
-            </a:fld>
-            <a:endParaRPr lang="en-US" sz="900" dirty="0"/>
-          </a:p>
-        </p:txBody>
-      </p:sp>
     </p:spTree>
   </p:cSld>
   <p:clrMapOvr>
@@ -48251,43 +46771,6 @@
           </a:p>
         </p:txBody>
       </p:sp>
-      <p:sp>
-        <p:nvSpPr>
-          <p:cNvPr id="4000" name="PageNum"/>
-          <p:cNvSpPr/>
-          <p:nvPr/>
-        </p:nvSpPr>
-        <p:spPr>
-          <a:xfrm>
-            <a:off x="8100000" y="228600"/>
-            <a:ext cx="400000" cy="182880"/>
-          </a:xfrm>
-          <a:prstGeom prst="rect">
-            <a:avLst/>
-          </a:prstGeom>
-          <a:noFill/>
-          <a:ln/>
-        </p:spPr>
-        <p:txBody>
-          <a:bodyPr wrap="square" lIns="0" tIns="0" rIns="0" bIns="0" rtlCol="0" anchor="ctr"/>
-          <a:lstStyle/>
-          <a:p>
-            <a:pPr marL="0" indent="0" algn="r">
-              <a:buNone/>
-            </a:pPr>
-            <a:fld id="{56F6C3C4-4813-440D-9C85-5537B89833EF}" type="slidenum">
-              <a:rPr lang="en-US" sz="900" dirty="0">
-                <a:solidFill>
-                  <a:srgbClr val="A09080"/>
-                </a:solidFill>
-                <a:latin typeface="Garamond" pitchFamily="34" charset="0"/>
-              </a:rPr>
-              <a:t>46</a:t>
-            </a:fld>
-            <a:endParaRPr lang="en-US" sz="900" dirty="0"/>
-          </a:p>
-        </p:txBody>
-      </p:sp>
     </p:spTree>
   </p:cSld>
   <p:clrMapOvr>
@@ -49391,43 +47874,6 @@
           </a:p>
         </p:txBody>
       </p:sp>
-      <p:sp>
-        <p:nvSpPr>
-          <p:cNvPr id="4000" name="PageNum"/>
-          <p:cNvSpPr/>
-          <p:nvPr/>
-        </p:nvSpPr>
-        <p:spPr>
-          <a:xfrm>
-            <a:off x="8100000" y="228600"/>
-            <a:ext cx="400000" cy="182880"/>
-          </a:xfrm>
-          <a:prstGeom prst="rect">
-            <a:avLst/>
-          </a:prstGeom>
-          <a:noFill/>
-          <a:ln/>
-        </p:spPr>
-        <p:txBody>
-          <a:bodyPr wrap="square" lIns="0" tIns="0" rIns="0" bIns="0" rtlCol="0" anchor="ctr"/>
-          <a:lstStyle/>
-          <a:p>
-            <a:pPr marL="0" indent="0" algn="r">
-              <a:buNone/>
-            </a:pPr>
-            <a:fld id="{E9A5C1E0-7EB4-4099-81C0-3D5B10AC020D}" type="slidenum">
-              <a:rPr lang="en-US" sz="900" dirty="0">
-                <a:solidFill>
-                  <a:srgbClr val="A09080"/>
-                </a:solidFill>
-                <a:latin typeface="Garamond" pitchFamily="34" charset="0"/>
-              </a:rPr>
-              <a:t>47</a:t>
-            </a:fld>
-            <a:endParaRPr lang="en-US" sz="900" dirty="0"/>
-          </a:p>
-        </p:txBody>
-      </p:sp>
     </p:spTree>
   </p:cSld>
   <p:clrMapOvr>
@@ -50442,43 +48888,6 @@
           </a:p>
         </p:txBody>
       </p:sp>
-      <p:sp>
-        <p:nvSpPr>
-          <p:cNvPr id="4000" name="PageNum"/>
-          <p:cNvSpPr/>
-          <p:nvPr/>
-        </p:nvSpPr>
-        <p:spPr>
-          <a:xfrm>
-            <a:off x="8100000" y="228600"/>
-            <a:ext cx="400000" cy="182880"/>
-          </a:xfrm>
-          <a:prstGeom prst="rect">
-            <a:avLst/>
-          </a:prstGeom>
-          <a:noFill/>
-          <a:ln/>
-        </p:spPr>
-        <p:txBody>
-          <a:bodyPr wrap="square" lIns="0" tIns="0" rIns="0" bIns="0" rtlCol="0" anchor="ctr"/>
-          <a:lstStyle/>
-          <a:p>
-            <a:pPr marL="0" indent="0" algn="r">
-              <a:buNone/>
-            </a:pPr>
-            <a:fld id="{061AA376-7C5A-4C69-959B-BAFD96C89551}" type="slidenum">
-              <a:rPr lang="en-US" sz="900" dirty="0">
-                <a:solidFill>
-                  <a:srgbClr val="A09080"/>
-                </a:solidFill>
-                <a:latin typeface="Garamond" pitchFamily="34" charset="0"/>
-              </a:rPr>
-              <a:t>48</a:t>
-            </a:fld>
-            <a:endParaRPr lang="en-US" sz="900" dirty="0"/>
-          </a:p>
-        </p:txBody>
-      </p:sp>
     </p:spTree>
   </p:cSld>
   <p:clrMapOvr>
@@ -52738,43 +51147,6 @@
           </a:p>
         </p:txBody>
       </p:sp>
-      <p:sp>
-        <p:nvSpPr>
-          <p:cNvPr id="4000" name="PageNum"/>
-          <p:cNvSpPr/>
-          <p:nvPr/>
-        </p:nvSpPr>
-        <p:spPr>
-          <a:xfrm>
-            <a:off x="8100000" y="228600"/>
-            <a:ext cx="400000" cy="182880"/>
-          </a:xfrm>
-          <a:prstGeom prst="rect">
-            <a:avLst/>
-          </a:prstGeom>
-          <a:noFill/>
-          <a:ln/>
-        </p:spPr>
-        <p:txBody>
-          <a:bodyPr wrap="square" lIns="0" tIns="0" rIns="0" bIns="0" rtlCol="0" anchor="ctr"/>
-          <a:lstStyle/>
-          <a:p>
-            <a:pPr marL="0" indent="0" algn="r">
-              <a:buNone/>
-            </a:pPr>
-            <a:fld id="{8260DD58-3F7F-4445-B201-0FA0B76EC4EE}" type="slidenum">
-              <a:rPr lang="en-US" sz="900" dirty="0">
-                <a:solidFill>
-                  <a:srgbClr val="A09080"/>
-                </a:solidFill>
-                <a:latin typeface="Garamond" pitchFamily="34" charset="0"/>
-              </a:rPr>
-              <a:t>49</a:t>
-            </a:fld>
-            <a:endParaRPr lang="en-US" sz="900" dirty="0"/>
-          </a:p>
-        </p:txBody>
-      </p:sp>
     </p:spTree>
   </p:cSld>
   <p:clrMapOvr>
@@ -54427,43 +52799,6 @@
           </a:p>
         </p:txBody>
       </p:sp>
-      <p:sp>
-        <p:nvSpPr>
-          <p:cNvPr id="4000" name="PageNum"/>
-          <p:cNvSpPr/>
-          <p:nvPr/>
-        </p:nvSpPr>
-        <p:spPr>
-          <a:xfrm>
-            <a:off x="8100000" y="228600"/>
-            <a:ext cx="400000" cy="182880"/>
-          </a:xfrm>
-          <a:prstGeom prst="rect">
-            <a:avLst/>
-          </a:prstGeom>
-          <a:noFill/>
-          <a:ln/>
-        </p:spPr>
-        <p:txBody>
-          <a:bodyPr wrap="square" lIns="0" tIns="0" rIns="0" bIns="0" rtlCol="0" anchor="ctr"/>
-          <a:lstStyle/>
-          <a:p>
-            <a:pPr marL="0" indent="0" algn="r">
-              <a:buNone/>
-            </a:pPr>
-            <a:fld id="{F2F77A34-4892-4E86-B73F-576053D6FBD5}" type="slidenum">
-              <a:rPr lang="en-US" sz="900" dirty="0">
-                <a:solidFill>
-                  <a:srgbClr val="A09080"/>
-                </a:solidFill>
-                <a:latin typeface="Garamond" pitchFamily="34" charset="0"/>
-              </a:rPr>
-              <a:t>5</a:t>
-            </a:fld>
-            <a:endParaRPr lang="en-US" sz="900" dirty="0"/>
-          </a:p>
-        </p:txBody>
-      </p:sp>
     </p:spTree>
   </p:cSld>
   <p:clrMapOvr>
@@ -56286,43 +54621,6 @@
           </a:p>
         </p:txBody>
       </p:sp>
-      <p:sp>
-        <p:nvSpPr>
-          <p:cNvPr id="4000" name="PageNum"/>
-          <p:cNvSpPr/>
-          <p:nvPr/>
-        </p:nvSpPr>
-        <p:spPr>
-          <a:xfrm>
-            <a:off x="8100000" y="228600"/>
-            <a:ext cx="400000" cy="182880"/>
-          </a:xfrm>
-          <a:prstGeom prst="rect">
-            <a:avLst/>
-          </a:prstGeom>
-          <a:noFill/>
-          <a:ln/>
-        </p:spPr>
-        <p:txBody>
-          <a:bodyPr wrap="square" lIns="0" tIns="0" rIns="0" bIns="0" rtlCol="0" anchor="ctr"/>
-          <a:lstStyle/>
-          <a:p>
-            <a:pPr marL="0" indent="0" algn="r">
-              <a:buNone/>
-            </a:pPr>
-            <a:fld id="{7772D56A-3B54-47C0-9969-B4B9B21E99BD}" type="slidenum">
-              <a:rPr lang="en-US" sz="900" dirty="0">
-                <a:solidFill>
-                  <a:srgbClr val="A09080"/>
-                </a:solidFill>
-                <a:latin typeface="Garamond" pitchFamily="34" charset="0"/>
-              </a:rPr>
-              <a:t>50</a:t>
-            </a:fld>
-            <a:endParaRPr lang="en-US" sz="900" dirty="0"/>
-          </a:p>
-        </p:txBody>
-      </p:sp>
     </p:spTree>
   </p:cSld>
   <p:clrMapOvr>
@@ -57861,43 +56159,6 @@
           </a:p>
         </p:txBody>
       </p:sp>
-      <p:sp>
-        <p:nvSpPr>
-          <p:cNvPr id="4000" name="PageNum"/>
-          <p:cNvSpPr/>
-          <p:nvPr/>
-        </p:nvSpPr>
-        <p:spPr>
-          <a:xfrm>
-            <a:off x="8100000" y="228600"/>
-            <a:ext cx="400000" cy="182880"/>
-          </a:xfrm>
-          <a:prstGeom prst="rect">
-            <a:avLst/>
-          </a:prstGeom>
-          <a:noFill/>
-          <a:ln/>
-        </p:spPr>
-        <p:txBody>
-          <a:bodyPr wrap="square" lIns="0" tIns="0" rIns="0" bIns="0" rtlCol="0" anchor="ctr"/>
-          <a:lstStyle/>
-          <a:p>
-            <a:pPr marL="0" indent="0" algn="r">
-              <a:buNone/>
-            </a:pPr>
-            <a:fld id="{71B05084-B0A2-445C-85DA-9DDCF05B48FD}" type="slidenum">
-              <a:rPr lang="en-US" sz="900" dirty="0">
-                <a:solidFill>
-                  <a:srgbClr val="A09080"/>
-                </a:solidFill>
-                <a:latin typeface="Garamond" pitchFamily="34" charset="0"/>
-              </a:rPr>
-              <a:t>51</a:t>
-            </a:fld>
-            <a:endParaRPr lang="en-US" sz="900" dirty="0"/>
-          </a:p>
-        </p:txBody>
-      </p:sp>
     </p:spTree>
   </p:cSld>
   <p:clrMapOvr>
@@ -59436,43 +57697,6 @@
           </a:p>
         </p:txBody>
       </p:sp>
-      <p:sp>
-        <p:nvSpPr>
-          <p:cNvPr id="4000" name="PageNum"/>
-          <p:cNvSpPr/>
-          <p:nvPr/>
-        </p:nvSpPr>
-        <p:spPr>
-          <a:xfrm>
-            <a:off x="8100000" y="228600"/>
-            <a:ext cx="400000" cy="182880"/>
-          </a:xfrm>
-          <a:prstGeom prst="rect">
-            <a:avLst/>
-          </a:prstGeom>
-          <a:noFill/>
-          <a:ln/>
-        </p:spPr>
-        <p:txBody>
-          <a:bodyPr wrap="square" lIns="0" tIns="0" rIns="0" bIns="0" rtlCol="0" anchor="ctr"/>
-          <a:lstStyle/>
-          <a:p>
-            <a:pPr marL="0" indent="0" algn="r">
-              <a:buNone/>
-            </a:pPr>
-            <a:fld id="{4AF7C340-D589-4055-A027-E6209DE3E042}" type="slidenum">
-              <a:rPr lang="en-US" sz="900" dirty="0">
-                <a:solidFill>
-                  <a:srgbClr val="A09080"/>
-                </a:solidFill>
-                <a:latin typeface="Garamond" pitchFamily="34" charset="0"/>
-              </a:rPr>
-              <a:t>52</a:t>
-            </a:fld>
-            <a:endParaRPr lang="en-US" sz="900" dirty="0"/>
-          </a:p>
-        </p:txBody>
-      </p:sp>
     </p:spTree>
   </p:cSld>
   <p:clrMapOvr>
@@ -60485,43 +58709,6 @@
           </a:p>
         </p:txBody>
       </p:sp>
-      <p:sp>
-        <p:nvSpPr>
-          <p:cNvPr id="4000" name="PageNum"/>
-          <p:cNvSpPr/>
-          <p:nvPr/>
-        </p:nvSpPr>
-        <p:spPr>
-          <a:xfrm>
-            <a:off x="8100000" y="228600"/>
-            <a:ext cx="400000" cy="182880"/>
-          </a:xfrm>
-          <a:prstGeom prst="rect">
-            <a:avLst/>
-          </a:prstGeom>
-          <a:noFill/>
-          <a:ln/>
-        </p:spPr>
-        <p:txBody>
-          <a:bodyPr wrap="square" lIns="0" tIns="0" rIns="0" bIns="0" rtlCol="0" anchor="ctr"/>
-          <a:lstStyle/>
-          <a:p>
-            <a:pPr marL="0" indent="0" algn="r">
-              <a:buNone/>
-            </a:pPr>
-            <a:fld id="{89058CF8-FBA4-43BD-88F4-486462DE9D8C}" type="slidenum">
-              <a:rPr lang="en-US" sz="900" dirty="0">
-                <a:solidFill>
-                  <a:srgbClr val="A09080"/>
-                </a:solidFill>
-                <a:latin typeface="Garamond" pitchFamily="34" charset="0"/>
-              </a:rPr>
-              <a:t>6</a:t>
-            </a:fld>
-            <a:endParaRPr lang="en-US" sz="900" dirty="0"/>
-          </a:p>
-        </p:txBody>
-      </p:sp>
     </p:spTree>
   </p:cSld>
   <p:clrMapOvr>
@@ -61736,49 +59923,6 @@
               <a:t>Affilior Gestion Privée  ·  Confidentiel  ·  [MOIS ANNÉE]  ·  Ce document ne constitue pas un conseil en investissement au sens MIF2</a:t>
             </a:r>
             <a:endParaRPr lang="en-US" sz="1100" dirty="0"/>
-          </a:p>
-        </p:txBody>
-      </p:sp>
-      <p:sp>
-        <p:nvSpPr>
-          <p:cNvPr id="89" name="PageNum">
-            <a:extLst>
-              <a:ext uri="{FF2B5EF4-FFF2-40B4-BE49-F238E27FC236}">
-                <a16:creationId xmlns:a16="http://schemas.microsoft.com/office/drawing/2014/main" id="{464A0250-CA00-F3B3-55D5-4D4958FCC45E}"/>
-              </a:ext>
-            </a:extLst>
-          </p:cNvPr>
-          <p:cNvSpPr/>
-          <p:nvPr/>
-        </p:nvSpPr>
-        <p:spPr>
-          <a:xfrm>
-            <a:off x="8100000" y="228600"/>
-            <a:ext cx="400000" cy="182880"/>
-          </a:xfrm>
-          <a:prstGeom prst="rect">
-            <a:avLst/>
-          </a:prstGeom>
-          <a:noFill/>
-          <a:ln/>
-        </p:spPr>
-        <p:txBody>
-          <a:bodyPr wrap="square" lIns="0" tIns="0" rIns="0" bIns="0" rtlCol="0" anchor="ctr"/>
-          <a:lstStyle/>
-          <a:p>
-            <a:pPr marL="0" indent="0" algn="r">
-              <a:buNone/>
-            </a:pPr>
-            <a:fld id="{10FAF57D-9689-440F-9950-4AB2FA11F867}" type="slidenum">
-              <a:rPr lang="en-US" sz="900" dirty="0">
-                <a:solidFill>
-                  <a:srgbClr val="A09080"/>
-                </a:solidFill>
-                <a:latin typeface="Garamond" pitchFamily="34" charset="0"/>
-              </a:rPr>
-              <a:t>7</a:t>
-            </a:fld>
-            <a:endParaRPr lang="en-US" sz="900" dirty="0"/>
           </a:p>
         </p:txBody>
       </p:sp>
@@ -62868,43 +61012,6 @@
           </a:p>
         </p:txBody>
       </p:sp>
-      <p:sp>
-        <p:nvSpPr>
-          <p:cNvPr id="4000" name="PageNum"/>
-          <p:cNvSpPr/>
-          <p:nvPr/>
-        </p:nvSpPr>
-        <p:spPr>
-          <a:xfrm>
-            <a:off x="8100000" y="228600"/>
-            <a:ext cx="400000" cy="182880"/>
-          </a:xfrm>
-          <a:prstGeom prst="rect">
-            <a:avLst/>
-          </a:prstGeom>
-          <a:noFill/>
-          <a:ln/>
-        </p:spPr>
-        <p:txBody>
-          <a:bodyPr wrap="square" lIns="0" tIns="0" rIns="0" bIns="0" rtlCol="0" anchor="ctr"/>
-          <a:lstStyle/>
-          <a:p>
-            <a:pPr marL="0" indent="0" algn="r">
-              <a:buNone/>
-            </a:pPr>
-            <a:fld id="{10FAF57D-9689-440F-9950-4AB2FA11F867}" type="slidenum">
-              <a:rPr lang="en-US" sz="900" dirty="0">
-                <a:solidFill>
-                  <a:srgbClr val="A09080"/>
-                </a:solidFill>
-                <a:latin typeface="Garamond" pitchFamily="34" charset="0"/>
-              </a:rPr>
-              <a:t>8</a:t>
-            </a:fld>
-            <a:endParaRPr lang="en-US" sz="900" dirty="0"/>
-          </a:p>
-        </p:txBody>
-      </p:sp>
     </p:spTree>
   </p:cSld>
   <p:clrMapOvr>
@@ -63882,43 +61989,6 @@
               <a:t>Affilior Gestion Privée  ·  Confidentiel  ·  [MOIS ANNÉE]  ·  Ce document ne constitue pas un conseil en investissement au sens MIF2</a:t>
             </a:r>
             <a:endParaRPr lang="en-US" sz="1100" dirty="0"/>
-          </a:p>
-        </p:txBody>
-      </p:sp>
-      <p:sp>
-        <p:nvSpPr>
-          <p:cNvPr id="4000" name="PageNum"/>
-          <p:cNvSpPr/>
-          <p:nvPr/>
-        </p:nvSpPr>
-        <p:spPr>
-          <a:xfrm>
-            <a:off x="8100000" y="228600"/>
-            <a:ext cx="400000" cy="182880"/>
-          </a:xfrm>
-          <a:prstGeom prst="rect">
-            <a:avLst/>
-          </a:prstGeom>
-          <a:noFill/>
-          <a:ln/>
-        </p:spPr>
-        <p:txBody>
-          <a:bodyPr wrap="square" lIns="0" tIns="0" rIns="0" bIns="0" rtlCol="0" anchor="ctr"/>
-          <a:lstStyle/>
-          <a:p>
-            <a:pPr marL="0" indent="0" algn="r">
-              <a:buNone/>
-            </a:pPr>
-            <a:fld id="{DFE48370-CFD3-4629-B851-CBD1CAA7BA73}" type="slidenum">
-              <a:rPr lang="en-US" sz="900" dirty="0">
-                <a:solidFill>
-                  <a:srgbClr val="A09080"/>
-                </a:solidFill>
-                <a:latin typeface="Garamond" pitchFamily="34" charset="0"/>
-              </a:rPr>
-              <a:t>9</a:t>
-            </a:fld>
-            <a:endParaRPr lang="en-US" sz="900" dirty="0"/>
           </a:p>
         </p:txBody>
       </p:sp>
